--- a/docs/tutor-program/HoS-briefing.pptx
+++ b/docs/tutor-program/HoS-briefing.pptx
@@ -4,19 +4,22 @@
   <p:sldMasterIdLst>
     <p:sldMasterId id="2147483648" r:id="rId1"/>
   </p:sldMasterIdLst>
+  <p:notesMasterIdLst>
+    <p:notesMasterId r:id="rId12"/>
+  </p:notesMasterIdLst>
   <p:sldIdLst>
-    <p:sldId id="256" r:id="rId7"/>
-    <p:sldId id="257" r:id="rId9"/>
-    <p:sldId id="258" r:id="rId10"/>
-    <p:sldId id="259" r:id="rId11"/>
-    <p:sldId id="260" r:id="rId12"/>
-    <p:sldId id="261" r:id="rId13"/>
-    <p:sldId id="262" r:id="rId14"/>
-    <p:sldId id="263" r:id="rId15"/>
-    <p:sldId id="264" r:id="rId16"/>
-    <p:sldId id="265" r:id="rId17"/>
+    <p:sldId id="256" r:id="rId2"/>
+    <p:sldId id="257" r:id="rId3"/>
+    <p:sldId id="258" r:id="rId4"/>
+    <p:sldId id="259" r:id="rId5"/>
+    <p:sldId id="260" r:id="rId6"/>
+    <p:sldId id="261" r:id="rId7"/>
+    <p:sldId id="262" r:id="rId8"/>
+    <p:sldId id="263" r:id="rId9"/>
+    <p:sldId id="264" r:id="rId10"/>
+    <p:sldId id="265" r:id="rId11"/>
   </p:sldIdLst>
-  <p:sldSz cx="12191695" cy="6858000" type="screen4x3"/>
+  <p:sldSz cx="12192000" cy="6858000"/>
   <p:notesSz cx="6858000" cy="9144000"/>
   <p:defaultTextStyle>
     <a:defPPr>
@@ -113,11 +116,27 @@
       </a:defRPr>
     </a:lvl9pPr>
   </p:defaultTextStyle>
+  <p:extLst>
+    <p:ext uri="{EFAFB233-063F-42B5-8137-9DF3F51BA10A}">
+      <p15:sldGuideLst xmlns:p15="http://schemas.microsoft.com/office/powerpoint/2012/main">
+        <p15:guide id="1" orient="horz" pos="2160">
+          <p15:clr>
+            <a:srgbClr val="A4A3A4"/>
+          </p15:clr>
+        </p15:guide>
+        <p15:guide id="2" pos="2880">
+          <p15:clr>
+            <a:srgbClr val="A4A3A4"/>
+          </p15:clr>
+        </p15:guide>
+      </p15:sldGuideLst>
+    </p:ext>
+  </p:extLst>
 </p:presentation>
 </file>
 
 <file path=ppt/notesMasters/notesMaster1.xml><?xml version="1.0" encoding="utf-8"?>
-<p:notesMaster xmlns:a="http://schemas.openxmlformats.org/drawingml/2006/main" xmlns:p="http://schemas.openxmlformats.org/presentationml/2006/main" xmlns:r="http://schemas.openxmlformats.org/officeDocument/2006/relationships">
+<p:notesMaster xmlns:a="http://schemas.openxmlformats.org/drawingml/2006/main" xmlns:r="http://schemas.openxmlformats.org/officeDocument/2006/relationships" xmlns:p="http://schemas.openxmlformats.org/presentationml/2006/main">
   <p:cSld>
     <p:bg>
       <p:bgRef idx="1001">
@@ -138,241 +157,16 @@
           <a:chExt cx="0" cy="0"/>
         </a:xfrm>
       </p:grpSpPr>
-      <p:sp>
-        <p:nvSpPr>
-          <p:cNvPr id="2" name="Header Placeholder 1"/>
-          <p:cNvSpPr>
-            <a:spLocks noGrp="1"/>
-          </p:cNvSpPr>
-          <p:nvPr>
-            <p:ph type="hdr" sz="quarter"/>
-          </p:nvPr>
-        </p:nvSpPr>
-        <p:spPr>
-          <a:xfrm>
-            <a:off x="0" y="0"/>
-            <a:ext cx="2971800" cy="457200"/>
-          </a:xfrm>
-          <a:prstGeom prst="rect">
-            <a:avLst/>
-          </a:prstGeom>
-        </p:spPr>
-        <p:txBody>
-          <a:bodyPr vert="horz" lIns="91440" tIns="45720" rIns="91440" bIns="45720" rtlCol="0"/>
-          <a:lstStyle>
-            <a:lvl1pPr algn="l">
-              <a:defRPr sz="1200"/>
-            </a:lvl1pPr>
-          </a:lstStyle>
-          <a:p>
-            <a:endParaRPr lang="en-US"/>
-          </a:p>
-        </p:txBody>
-      </p:sp>
-      <p:sp>
-        <p:nvSpPr>
-          <p:cNvPr id="3" name="Date Placeholder 2"/>
-          <p:cNvSpPr>
-            <a:spLocks noGrp="1"/>
-          </p:cNvSpPr>
-          <p:nvPr>
-            <p:ph type="dt" idx="1"/>
-          </p:nvPr>
-        </p:nvSpPr>
-        <p:spPr>
-          <a:xfrm>
-            <a:off x="3884613" y="0"/>
-            <a:ext cx="2971800" cy="457200"/>
-          </a:xfrm>
-          <a:prstGeom prst="rect">
-            <a:avLst/>
-          </a:prstGeom>
-        </p:spPr>
-        <p:txBody>
-          <a:bodyPr vert="horz" lIns="91440" tIns="45720" rIns="91440" bIns="45720" rtlCol="0"/>
-          <a:lstStyle>
-            <a:lvl1pPr algn="r">
-              <a:defRPr sz="1200"/>
-            </a:lvl1pPr>
-          </a:lstStyle>
-          <a:p>
-            <a:fld id="{0F89C1C7-3DCD-1040-A9CF-14679D8B5DDD}" type="datetimeFigureOut">
-              <a:rPr lang="en-US" smtClean="0"/>
-              <a:t>10/17/16</a:t>
-            </a:fld>
-            <a:endParaRPr lang="en-US"/>
-          </a:p>
-        </p:txBody>
-      </p:sp>
-      <p:sp>
-        <p:nvSpPr>
-          <p:cNvPr id="4" name="Slide Image Placeholder 3"/>
-          <p:cNvSpPr>
-            <a:spLocks noGrp="1" noRot="1" noChangeAspect="1"/>
-          </p:cNvSpPr>
-          <p:nvPr>
-            <p:ph type="sldImg" idx="2"/>
-          </p:nvPr>
-        </p:nvSpPr>
-        <p:spPr>
-          <a:xfrm>
-            <a:off x="1143000" y="685800"/>
-            <a:ext cx="4572000" cy="3429000"/>
-          </a:xfrm>
-          <a:prstGeom prst="rect">
-            <a:avLst/>
-          </a:prstGeom>
-          <a:noFill/>
-          <a:ln w="12700">
-            <a:solidFill>
-              <a:prstClr val="black"/>
-            </a:solidFill>
-          </a:ln>
-        </p:spPr>
-        <p:txBody>
-          <a:bodyPr vert="horz" lIns="91440" tIns="45720" rIns="91440" bIns="45720" rtlCol="0" anchor="ctr"/>
-          <a:lstStyle/>
-          <a:p>
-            <a:endParaRPr lang="en-US"/>
-          </a:p>
-        </p:txBody>
-      </p:sp>
-      <p:sp>
-        <p:nvSpPr>
-          <p:cNvPr id="5" name="Notes Placeholder 4"/>
-          <p:cNvSpPr>
-            <a:spLocks noGrp="1"/>
-          </p:cNvSpPr>
-          <p:nvPr>
-            <p:ph type="body" sz="quarter" idx="3"/>
-          </p:nvPr>
-        </p:nvSpPr>
-        <p:spPr>
-          <a:xfrm>
-            <a:off x="685800" y="4343400"/>
-            <a:ext cx="5486400" cy="4114800"/>
-          </a:xfrm>
-          <a:prstGeom prst="rect">
-            <a:avLst/>
-          </a:prstGeom>
-        </p:spPr>
-        <p:txBody>
-          <a:bodyPr vert="horz" lIns="91440" tIns="45720" rIns="91440" bIns="45720" rtlCol="0"/>
-          <a:lstStyle/>
-          <a:p>
-            <a:pPr lvl="0"/>
-            <a:r>
-              <a:rPr lang="en-US" smtClean="0"/>
-              <a:t>Click to edit Master text styles</a:t>
-            </a:r>
-          </a:p>
-          <a:p>
-            <a:pPr lvl="1"/>
-            <a:r>
-              <a:rPr lang="en-US" smtClean="0"/>
-              <a:t>Second level</a:t>
-            </a:r>
-          </a:p>
-          <a:p>
-            <a:pPr lvl="2"/>
-            <a:r>
-              <a:rPr lang="en-US" smtClean="0"/>
-              <a:t>Third level</a:t>
-            </a:r>
-          </a:p>
-          <a:p>
-            <a:pPr lvl="3"/>
-            <a:r>
-              <a:rPr lang="en-US" smtClean="0"/>
-              <a:t>Fourth level</a:t>
-            </a:r>
-          </a:p>
-          <a:p>
-            <a:pPr lvl="4"/>
-            <a:r>
-              <a:rPr lang="en-US" smtClean="0"/>
-              <a:t>Fifth level</a:t>
-            </a:r>
-            <a:endParaRPr lang="en-US"/>
-          </a:p>
-        </p:txBody>
-      </p:sp>
-      <p:sp>
-        <p:nvSpPr>
-          <p:cNvPr id="6" name="Footer Placeholder 5"/>
-          <p:cNvSpPr>
-            <a:spLocks noGrp="1"/>
-          </p:cNvSpPr>
-          <p:nvPr>
-            <p:ph type="ftr" sz="quarter" idx="4"/>
-          </p:nvPr>
-        </p:nvSpPr>
-        <p:spPr>
-          <a:xfrm>
-            <a:off x="0" y="8685213"/>
-            <a:ext cx="2971800" cy="457200"/>
-          </a:xfrm>
-          <a:prstGeom prst="rect">
-            <a:avLst/>
-          </a:prstGeom>
-        </p:spPr>
-        <p:txBody>
-          <a:bodyPr vert="horz" lIns="91440" tIns="45720" rIns="91440" bIns="45720" rtlCol="0" anchor="b"/>
-          <a:lstStyle>
-            <a:lvl1pPr algn="l">
-              <a:defRPr sz="1200"/>
-            </a:lvl1pPr>
-          </a:lstStyle>
-          <a:p>
-            <a:endParaRPr lang="en-US"/>
-          </a:p>
-        </p:txBody>
-      </p:sp>
-      <p:sp>
-        <p:nvSpPr>
-          <p:cNvPr id="7" name="Slide Number Placeholder 6"/>
-          <p:cNvSpPr>
-            <a:spLocks noGrp="1"/>
-          </p:cNvSpPr>
-          <p:nvPr>
-            <p:ph type="sldNum" sz="quarter" idx="5"/>
-          </p:nvPr>
-        </p:nvSpPr>
-        <p:spPr>
-          <a:xfrm>
-            <a:off x="3884613" y="8685213"/>
-            <a:ext cx="2971800" cy="457200"/>
-          </a:xfrm>
-          <a:prstGeom prst="rect">
-            <a:avLst/>
-          </a:prstGeom>
-        </p:spPr>
-        <p:txBody>
-          <a:bodyPr vert="horz" lIns="91440" tIns="45720" rIns="91440" bIns="45720" rtlCol="0" anchor="b"/>
-          <a:lstStyle>
-            <a:lvl1pPr algn="r">
-              <a:defRPr sz="1200"/>
-            </a:lvl1pPr>
-          </a:lstStyle>
-          <a:p>
-            <a:fld id="{BB5E49A5-4136-284D-997B-48E1D791AD67}" type="slidenum">
-              <a:rPr lang="en-US" smtClean="0"/>
-              <a:t>‹#›</a:t>
-            </a:fld>
-            <a:endParaRPr lang="en-US"/>
-          </a:p>
-        </p:txBody>
-      </p:sp>
     </p:spTree>
     <p:extLst>
       <p:ext uri="{BB962C8B-B14F-4D97-AF65-F5344CB8AC3E}">
-        <p14:creationId xmlns:p14="http://schemas.microsoft.com/office/powerpoint/2010/main" val="2623252185"/>
+        <p14:creationId xmlns:p14="http://schemas.microsoft.com/office/powerpoint/2010/main" val="2812036747"/>
       </p:ext>
     </p:extLst>
   </p:cSld>
   <p:clrMap bg1="lt1" tx1="dk1" bg2="lt2" tx2="dk2" accent1="accent1" accent2="accent2" accent3="accent3" accent4="accent4" accent5="accent5" accent6="accent6" hlink="hlink" folHlink="folHlink"/>
   <p:notesStyle>
-    <a:lvl1pPr marL="0" algn="l" defTabSz="457200" rtl="0" eaLnBrk="1" latinLnBrk="0" hangingPunct="1">
+    <a:lvl1pPr marL="0" algn="l" defTabSz="914400" rtl="0" eaLnBrk="1" latinLnBrk="0" hangingPunct="1">
       <a:defRPr sz="1200" kern="1200">
         <a:solidFill>
           <a:schemeClr val="tx1"/>
@@ -382,7 +176,7 @@
         <a:cs typeface="+mn-cs"/>
       </a:defRPr>
     </a:lvl1pPr>
-    <a:lvl2pPr marL="457200" algn="l" defTabSz="457200" rtl="0" eaLnBrk="1" latinLnBrk="0" hangingPunct="1">
+    <a:lvl2pPr marL="457200" algn="l" defTabSz="914400" rtl="0" eaLnBrk="1" latinLnBrk="0" hangingPunct="1">
       <a:defRPr sz="1200" kern="1200">
         <a:solidFill>
           <a:schemeClr val="tx1"/>
@@ -392,7 +186,7 @@
         <a:cs typeface="+mn-cs"/>
       </a:defRPr>
     </a:lvl2pPr>
-    <a:lvl3pPr marL="914400" algn="l" defTabSz="457200" rtl="0" eaLnBrk="1" latinLnBrk="0" hangingPunct="1">
+    <a:lvl3pPr marL="914400" algn="l" defTabSz="914400" rtl="0" eaLnBrk="1" latinLnBrk="0" hangingPunct="1">
       <a:defRPr sz="1200" kern="1200">
         <a:solidFill>
           <a:schemeClr val="tx1"/>
@@ -402,7 +196,7 @@
         <a:cs typeface="+mn-cs"/>
       </a:defRPr>
     </a:lvl3pPr>
-    <a:lvl4pPr marL="1371600" algn="l" defTabSz="457200" rtl="0" eaLnBrk="1" latinLnBrk="0" hangingPunct="1">
+    <a:lvl4pPr marL="1371600" algn="l" defTabSz="914400" rtl="0" eaLnBrk="1" latinLnBrk="0" hangingPunct="1">
       <a:defRPr sz="1200" kern="1200">
         <a:solidFill>
           <a:schemeClr val="tx1"/>
@@ -412,7 +206,7 @@
         <a:cs typeface="+mn-cs"/>
       </a:defRPr>
     </a:lvl4pPr>
-    <a:lvl5pPr marL="1828800" algn="l" defTabSz="457200" rtl="0" eaLnBrk="1" latinLnBrk="0" hangingPunct="1">
+    <a:lvl5pPr marL="1828800" algn="l" defTabSz="914400" rtl="0" eaLnBrk="1" latinLnBrk="0" hangingPunct="1">
       <a:defRPr sz="1200" kern="1200">
         <a:solidFill>
           <a:schemeClr val="tx1"/>
@@ -422,7 +216,7 @@
         <a:cs typeface="+mn-cs"/>
       </a:defRPr>
     </a:lvl5pPr>
-    <a:lvl6pPr marL="2286000" algn="l" defTabSz="457200" rtl="0" eaLnBrk="1" latinLnBrk="0" hangingPunct="1">
+    <a:lvl6pPr marL="2286000" algn="l" defTabSz="914400" rtl="0" eaLnBrk="1" latinLnBrk="0" hangingPunct="1">
       <a:defRPr sz="1200" kern="1200">
         <a:solidFill>
           <a:schemeClr val="tx1"/>
@@ -432,7 +226,7 @@
         <a:cs typeface="+mn-cs"/>
       </a:defRPr>
     </a:lvl6pPr>
-    <a:lvl7pPr marL="2743200" algn="l" defTabSz="457200" rtl="0" eaLnBrk="1" latinLnBrk="0" hangingPunct="1">
+    <a:lvl7pPr marL="2743200" algn="l" defTabSz="914400" rtl="0" eaLnBrk="1" latinLnBrk="0" hangingPunct="1">
       <a:defRPr sz="1200" kern="1200">
         <a:solidFill>
           <a:schemeClr val="tx1"/>
@@ -442,7 +236,7 @@
         <a:cs typeface="+mn-cs"/>
       </a:defRPr>
     </a:lvl7pPr>
-    <a:lvl8pPr marL="3200400" algn="l" defTabSz="457200" rtl="0" eaLnBrk="1" latinLnBrk="0" hangingPunct="1">
+    <a:lvl8pPr marL="3200400" algn="l" defTabSz="914400" rtl="0" eaLnBrk="1" latinLnBrk="0" hangingPunct="1">
       <a:defRPr sz="1200" kern="1200">
         <a:solidFill>
           <a:schemeClr val="tx1"/>
@@ -452,7 +246,7 @@
         <a:cs typeface="+mn-cs"/>
       </a:defRPr>
     </a:lvl8pPr>
-    <a:lvl9pPr marL="3657600" algn="l" defTabSz="457200" rtl="0" eaLnBrk="1" latinLnBrk="0" hangingPunct="1">
+    <a:lvl9pPr marL="3657600" algn="l" defTabSz="914400" rtl="0" eaLnBrk="1" latinLnBrk="0" hangingPunct="1">
       <a:defRPr sz="1200" kern="1200">
         <a:solidFill>
           <a:schemeClr val="tx1"/>
@@ -464,706 +258,6 @@
     </a:lvl9pPr>
   </p:notesStyle>
 </p:notesMaster>
-</file>
-
-<file path=ppt/notesSlides/notesSlide1.xml><?xml version="1.0" encoding="utf-8"?>
-<p:notes xmlns:a="http://schemas.openxmlformats.org/drawingml/2006/main" xmlns:p="http://schemas.openxmlformats.org/presentationml/2006/main" xmlns:r="http://schemas.openxmlformats.org/officeDocument/2006/relationships">
-  <p:cSld>
-    <p:spTree>
-      <p:nvGrpSpPr>
-        <p:cNvPr id="1" name=""/>
-        <p:cNvGrpSpPr/>
-        <p:nvPr/>
-      </p:nvGrpSpPr>
-      <p:grpSpPr>
-        <a:xfrm>
-          <a:off x="0" y="0"/>
-          <a:ext cx="0" cy="0"/>
-          <a:chOff x="0" y="0"/>
-          <a:chExt cx="0" cy="0"/>
-        </a:xfrm>
-      </p:grpSpPr>
-      <p:sp>
-        <p:nvSpPr>
-          <p:cNvPr id="2" name="Slide Image Placeholder 1"/>
-          <p:cNvSpPr>
-            <a:spLocks noGrp="1"/>
-          </p:cNvSpPr>
-          <p:nvPr>
-            <p:ph type="sldImg" idx="2"/>
-          </p:nvPr>
-        </p:nvSpPr>
-        <p:spPr/>
-      </p:sp>
-      <p:sp>
-        <p:nvSpPr>
-          <p:cNvPr id="3" name="Notes Placeholder 2"/>
-          <p:cNvSpPr>
-            <a:spLocks noGrp="1"/>
-          </p:cNvSpPr>
-          <p:nvPr>
-            <p:ph type="body" idx="3" sz="quarter"/>
-          </p:nvPr>
-        </p:nvSpPr>
-        <p:spPr/>
-        <p:txBody>
-          <a:bodyPr/>
-          <a:lstStyle/>
-          <a:p>
-            <a:r>
-              <a:t>Two halves. A tutor pool that makes candidates findable — built, deployed, and I can demonstrate it today. And the training that makes them ready, which is what I am asking the School to endorse.</a:t>
-            </a:r>
-          </a:p>
-        </p:txBody>
-      </p:sp>
-      <p:sp>
-        <p:nvSpPr>
-          <p:cNvPr id="4" name="Slide Number Placeholder 3"/>
-          <p:cNvSpPr>
-            <a:spLocks noGrp="1"/>
-          </p:cNvSpPr>
-          <p:nvPr>
-            <p:ph type="sldNum" idx="5" sz="quarter"/>
-          </p:nvPr>
-        </p:nvSpPr>
-        <p:spPr/>
-      </p:sp>
-    </p:spTree>
-  </p:cSld>
-  <p:clrMapOvr>
-    <a:masterClrMapping/>
-  </p:clrMapOvr>
-</p:notes>
-</file>
-
-<file path=ppt/notesSlides/notesSlide10.xml><?xml version="1.0" encoding="utf-8"?>
-<p:notes xmlns:a="http://schemas.openxmlformats.org/drawingml/2006/main" xmlns:p="http://schemas.openxmlformats.org/presentationml/2006/main" xmlns:r="http://schemas.openxmlformats.org/officeDocument/2006/relationships">
-  <p:cSld>
-    <p:spTree>
-      <p:nvGrpSpPr>
-        <p:cNvPr id="1" name=""/>
-        <p:cNvGrpSpPr/>
-        <p:nvPr/>
-      </p:nvGrpSpPr>
-      <p:grpSpPr>
-        <a:xfrm>
-          <a:off x="0" y="0"/>
-          <a:ext cx="0" cy="0"/>
-          <a:chOff x="0" y="0"/>
-          <a:chExt cx="0" cy="0"/>
-        </a:xfrm>
-      </p:grpSpPr>
-      <p:sp>
-        <p:nvSpPr>
-          <p:cNvPr id="2" name="Slide Image Placeholder 1"/>
-          <p:cNvSpPr>
-            <a:spLocks noGrp="1"/>
-          </p:cNvSpPr>
-          <p:nvPr>
-            <p:ph type="sldImg" idx="2"/>
-          </p:nvPr>
-        </p:nvSpPr>
-        <p:spPr/>
-      </p:sp>
-      <p:sp>
-        <p:nvSpPr>
-          <p:cNvPr id="3" name="Notes Placeholder 2"/>
-          <p:cNvSpPr>
-            <a:spLocks noGrp="1"/>
-          </p:cNvSpPr>
-          <p:nvPr>
-            <p:ph type="body" idx="3" sz="quarter"/>
-          </p:nvPr>
-        </p:nvSpPr>
-        <p:spPr/>
-        <p:txBody>
-          <a:bodyPr/>
-          <a:lstStyle/>
-          <a:p>
-            <a:r>
-              <a:t>The system is a pool, and a pool only works if something keeps filling it. That is Step 1: at results release, convenors invite the students who did well. Today students find out about tutoring by knowing somebody, which is both a narrower and a less fair pool than it should be. Step 4 is the training, and the only part that does not exist in some form already.</a:t>
-            </a:r>
-          </a:p>
-        </p:txBody>
-      </p:sp>
-      <p:sp>
-        <p:nvSpPr>
-          <p:cNvPr id="4" name="Slide Number Placeholder 3"/>
-          <p:cNvSpPr>
-            <a:spLocks noGrp="1"/>
-          </p:cNvSpPr>
-          <p:nvPr>
-            <p:ph type="sldNum" idx="5" sz="quarter"/>
-          </p:nvPr>
-        </p:nvSpPr>
-        <p:spPr/>
-      </p:sp>
-    </p:spTree>
-  </p:cSld>
-  <p:clrMapOvr>
-    <a:masterClrMapping/>
-  </p:clrMapOvr>
-</p:notes>
-</file>
-
-<file path=ppt/notesSlides/notesSlide2.xml><?xml version="1.0" encoding="utf-8"?>
-<p:notes xmlns:a="http://schemas.openxmlformats.org/drawingml/2006/main" xmlns:p="http://schemas.openxmlformats.org/presentationml/2006/main" xmlns:r="http://schemas.openxmlformats.org/officeDocument/2006/relationships">
-  <p:cSld>
-    <p:spTree>
-      <p:nvGrpSpPr>
-        <p:cNvPr id="1" name=""/>
-        <p:cNvGrpSpPr/>
-        <p:nvPr/>
-      </p:nvGrpSpPr>
-      <p:grpSpPr>
-        <a:xfrm>
-          <a:off x="0" y="0"/>
-          <a:ext cx="0" cy="0"/>
-          <a:chOff x="0" y="0"/>
-          <a:chExt cx="0" cy="0"/>
-        </a:xfrm>
-      </p:grpSpPr>
-      <p:sp>
-        <p:nvSpPr>
-          <p:cNvPr id="2" name="Slide Image Placeholder 1"/>
-          <p:cNvSpPr>
-            <a:spLocks noGrp="1"/>
-          </p:cNvSpPr>
-          <p:nvPr>
-            <p:ph type="sldImg" idx="2"/>
-          </p:nvPr>
-        </p:nvSpPr>
-        <p:spPr/>
-      </p:sp>
-      <p:sp>
-        <p:nvSpPr>
-          <p:cNvPr id="3" name="Notes Placeholder 2"/>
-          <p:cNvSpPr>
-            <a:spLocks noGrp="1"/>
-          </p:cNvSpPr>
-          <p:nvPr>
-            <p:ph type="body" idx="3" sz="quarter"/>
-          </p:nvPr>
-        </p:nvSpPr>
-        <p:spPr/>
-        <p:txBody>
-          <a:bodyPr/>
-          <a:lstStyle/>
-          <a:p>
-            <a:r>
-              <a:t>This is the whole argument. A convenor staffing a course today relies on who they happen to know, which is both a narrower pool and a less fair one — a strong student with no connection to the teaching team never hears about it. A pool makes the same decision on better information, and keeps the record.</a:t>
-            </a:r>
-          </a:p>
-        </p:txBody>
-      </p:sp>
-      <p:sp>
-        <p:nvSpPr>
-          <p:cNvPr id="4" name="Slide Number Placeholder 3"/>
-          <p:cNvSpPr>
-            <a:spLocks noGrp="1"/>
-          </p:cNvSpPr>
-          <p:nvPr>
-            <p:ph type="sldNum" idx="5" sz="quarter"/>
-          </p:nvPr>
-        </p:nvSpPr>
-        <p:spPr/>
-      </p:sp>
-    </p:spTree>
-  </p:cSld>
-  <p:clrMapOvr>
-    <a:masterClrMapping/>
-  </p:clrMapOvr>
-</p:notes>
-</file>
-
-<file path=ppt/notesSlides/notesSlide3.xml><?xml version="1.0" encoding="utf-8"?>
-<p:notes xmlns:a="http://schemas.openxmlformats.org/drawingml/2006/main" xmlns:p="http://schemas.openxmlformats.org/presentationml/2006/main" xmlns:r="http://schemas.openxmlformats.org/officeDocument/2006/relationships">
-  <p:cSld>
-    <p:spTree>
-      <p:nvGrpSpPr>
-        <p:cNvPr id="1" name=""/>
-        <p:cNvGrpSpPr/>
-        <p:nvPr/>
-      </p:nvGrpSpPr>
-      <p:grpSpPr>
-        <a:xfrm>
-          <a:off x="0" y="0"/>
-          <a:ext cx="0" cy="0"/>
-          <a:chOff x="0" y="0"/>
-          <a:chExt cx="0" cy="0"/>
-        </a:xfrm>
-      </p:grpSpPr>
-      <p:sp>
-        <p:nvSpPr>
-          <p:cNvPr id="2" name="Slide Image Placeholder 1"/>
-          <p:cNvSpPr>
-            <a:spLocks noGrp="1"/>
-          </p:cNvSpPr>
-          <p:nvPr>
-            <p:ph type="sldImg" idx="2"/>
-          </p:nvPr>
-        </p:nvSpPr>
-        <p:spPr/>
-      </p:sp>
-      <p:sp>
-        <p:nvSpPr>
-          <p:cNvPr id="3" name="Notes Placeholder 2"/>
-          <p:cNvSpPr>
-            <a:spLocks noGrp="1"/>
-          </p:cNvSpPr>
-          <p:nvPr>
-            <p:ph type="body" idx="3" sz="quarter"/>
-          </p:nvPr>
-        </p:nvSpPr>
-        <p:spPr/>
-        <p:txBody>
-          <a:bodyPr/>
-          <a:lstStyle/>
-          <a:p>
-            <a:r>
-              <a:t>Two links: one goes to students, one to staff, so each audience sees only what applies to them. Built at no cost to the School.</a:t>
-            </a:r>
-          </a:p>
-        </p:txBody>
-      </p:sp>
-      <p:sp>
-        <p:nvSpPr>
-          <p:cNvPr id="4" name="Slide Number Placeholder 3"/>
-          <p:cNvSpPr>
-            <a:spLocks noGrp="1"/>
-          </p:cNvSpPr>
-          <p:nvPr>
-            <p:ph type="sldNum" idx="5" sz="quarter"/>
-          </p:nvPr>
-        </p:nvSpPr>
-        <p:spPr/>
-      </p:sp>
-    </p:spTree>
-  </p:cSld>
-  <p:clrMapOvr>
-    <a:masterClrMapping/>
-  </p:clrMapOvr>
-</p:notes>
-</file>
-
-<file path=ppt/notesSlides/notesSlide4.xml><?xml version="1.0" encoding="utf-8"?>
-<p:notes xmlns:a="http://schemas.openxmlformats.org/drawingml/2006/main" xmlns:p="http://schemas.openxmlformats.org/presentationml/2006/main" xmlns:r="http://schemas.openxmlformats.org/officeDocument/2006/relationships">
-  <p:cSld>
-    <p:spTree>
-      <p:nvGrpSpPr>
-        <p:cNvPr id="1" name=""/>
-        <p:cNvGrpSpPr/>
-        <p:nvPr/>
-      </p:nvGrpSpPr>
-      <p:grpSpPr>
-        <a:xfrm>
-          <a:off x="0" y="0"/>
-          <a:ext cx="0" cy="0"/>
-          <a:chOff x="0" y="0"/>
-          <a:chExt cx="0" cy="0"/>
-        </a:xfrm>
-      </p:grpSpPr>
-      <p:sp>
-        <p:nvSpPr>
-          <p:cNvPr id="2" name="Slide Image Placeholder 1"/>
-          <p:cNvSpPr>
-            <a:spLocks noGrp="1"/>
-          </p:cNvSpPr>
-          <p:nvPr>
-            <p:ph type="sldImg" idx="2"/>
-          </p:nvPr>
-        </p:nvSpPr>
-        <p:spPr/>
-      </p:sp>
-      <p:sp>
-        <p:nvSpPr>
-          <p:cNvPr id="3" name="Notes Placeholder 2"/>
-          <p:cNvSpPr>
-            <a:spLocks noGrp="1"/>
-          </p:cNvSpPr>
-          <p:nvPr>
-            <p:ph type="body" idx="3" sz="quarter"/>
-          </p:nvPr>
-        </p:nvSpPr>
-        <p:spPr/>
-        <p:txBody>
-          <a:bodyPr/>
-          <a:lstStyle/>
-          <a:p>
-            <a:r>
-              <a:t>Students have exactly one job here, so they get exactly one page and no navigation to learn.</a:t>
-            </a:r>
-          </a:p>
-        </p:txBody>
-      </p:sp>
-      <p:sp>
-        <p:nvSpPr>
-          <p:cNvPr id="4" name="Slide Number Placeholder 3"/>
-          <p:cNvSpPr>
-            <a:spLocks noGrp="1"/>
-          </p:cNvSpPr>
-          <p:nvPr>
-            <p:ph type="sldNum" idx="5" sz="quarter"/>
-          </p:nvPr>
-        </p:nvSpPr>
-        <p:spPr/>
-      </p:sp>
-    </p:spTree>
-  </p:cSld>
-  <p:clrMapOvr>
-    <a:masterClrMapping/>
-  </p:clrMapOvr>
-</p:notes>
-</file>
-
-<file path=ppt/notesSlides/notesSlide5.xml><?xml version="1.0" encoding="utf-8"?>
-<p:notes xmlns:a="http://schemas.openxmlformats.org/drawingml/2006/main" xmlns:p="http://schemas.openxmlformats.org/presentationml/2006/main" xmlns:r="http://schemas.openxmlformats.org/officeDocument/2006/relationships">
-  <p:cSld>
-    <p:spTree>
-      <p:nvGrpSpPr>
-        <p:cNvPr id="1" name=""/>
-        <p:cNvGrpSpPr/>
-        <p:nvPr/>
-      </p:nvGrpSpPr>
-      <p:grpSpPr>
-        <a:xfrm>
-          <a:off x="0" y="0"/>
-          <a:ext cx="0" cy="0"/>
-          <a:chOff x="0" y="0"/>
-          <a:chExt cx="0" cy="0"/>
-        </a:xfrm>
-      </p:grpSpPr>
-      <p:sp>
-        <p:nvSpPr>
-          <p:cNvPr id="2" name="Slide Image Placeholder 1"/>
-          <p:cNvSpPr>
-            <a:spLocks noGrp="1"/>
-          </p:cNvSpPr>
-          <p:nvPr>
-            <p:ph type="sldImg" idx="2"/>
-          </p:nvPr>
-        </p:nvSpPr>
-        <p:spPr/>
-      </p:sp>
-      <p:sp>
-        <p:nvSpPr>
-          <p:cNvPr id="3" name="Notes Placeholder 2"/>
-          <p:cNvSpPr>
-            <a:spLocks noGrp="1"/>
-          </p:cNvSpPr>
-          <p:nvPr>
-            <p:ph type="body" idx="3" sz="quarter"/>
-          </p:nvPr>
-        </p:nvSpPr>
-        <p:spPr/>
-        <p:txBody>
-          <a:bodyPr/>
-          <a:lstStyle/>
-          <a:p>
-            <a:r>
-              <a:t>This is the page that addresses the real problem. Convenors do not struggle to run a selection process — they struggle to find out who is available at all. Note the people who have taught a course but did not apply this time; they were invisible before.</a:t>
-            </a:r>
-          </a:p>
-        </p:txBody>
-      </p:sp>
-      <p:sp>
-        <p:nvSpPr>
-          <p:cNvPr id="4" name="Slide Number Placeholder 3"/>
-          <p:cNvSpPr>
-            <a:spLocks noGrp="1"/>
-          </p:cNvSpPr>
-          <p:nvPr>
-            <p:ph type="sldNum" idx="5" sz="quarter"/>
-          </p:nvPr>
-        </p:nvSpPr>
-        <p:spPr/>
-      </p:sp>
-    </p:spTree>
-  </p:cSld>
-  <p:clrMapOvr>
-    <a:masterClrMapping/>
-  </p:clrMapOvr>
-</p:notes>
-</file>
-
-<file path=ppt/notesSlides/notesSlide6.xml><?xml version="1.0" encoding="utf-8"?>
-<p:notes xmlns:a="http://schemas.openxmlformats.org/drawingml/2006/main" xmlns:p="http://schemas.openxmlformats.org/presentationml/2006/main" xmlns:r="http://schemas.openxmlformats.org/officeDocument/2006/relationships">
-  <p:cSld>
-    <p:spTree>
-      <p:nvGrpSpPr>
-        <p:cNvPr id="1" name=""/>
-        <p:cNvGrpSpPr/>
-        <p:nvPr/>
-      </p:nvGrpSpPr>
-      <p:grpSpPr>
-        <a:xfrm>
-          <a:off x="0" y="0"/>
-          <a:ext cx="0" cy="0"/>
-          <a:chOff x="0" y="0"/>
-          <a:chExt cx="0" cy="0"/>
-        </a:xfrm>
-      </p:grpSpPr>
-      <p:sp>
-        <p:nvSpPr>
-          <p:cNvPr id="2" name="Slide Image Placeholder 1"/>
-          <p:cNvSpPr>
-            <a:spLocks noGrp="1"/>
-          </p:cNvSpPr>
-          <p:nvPr>
-            <p:ph type="sldImg" idx="2"/>
-          </p:nvPr>
-        </p:nvSpPr>
-        <p:spPr/>
-      </p:sp>
-      <p:sp>
-        <p:nvSpPr>
-          <p:cNvPr id="3" name="Notes Placeholder 2"/>
-          <p:cNvSpPr>
-            <a:spLocks noGrp="1"/>
-          </p:cNvSpPr>
-          <p:nvPr>
-            <p:ph type="body" idx="3" sz="quarter"/>
-          </p:nvPr>
-        </p:nvSpPr>
-        <p:spPr/>
-        <p:txBody>
-          <a:bodyPr/>
-          <a:lstStyle/>
-          <a:p>
-            <a:r>
-              <a:t>No approval workflow and no shortlisting buttons. The system informs the convenor; the decision and the conversation stay theirs.</a:t>
-            </a:r>
-          </a:p>
-        </p:txBody>
-      </p:sp>
-      <p:sp>
-        <p:nvSpPr>
-          <p:cNvPr id="4" name="Slide Number Placeholder 3"/>
-          <p:cNvSpPr>
-            <a:spLocks noGrp="1"/>
-          </p:cNvSpPr>
-          <p:nvPr>
-            <p:ph type="sldNum" idx="5" sz="quarter"/>
-          </p:nvPr>
-        </p:nvSpPr>
-        <p:spPr/>
-      </p:sp>
-    </p:spTree>
-  </p:cSld>
-  <p:clrMapOvr>
-    <a:masterClrMapping/>
-  </p:clrMapOvr>
-</p:notes>
-</file>
-
-<file path=ppt/notesSlides/notesSlide7.xml><?xml version="1.0" encoding="utf-8"?>
-<p:notes xmlns:a="http://schemas.openxmlformats.org/drawingml/2006/main" xmlns:p="http://schemas.openxmlformats.org/presentationml/2006/main" xmlns:r="http://schemas.openxmlformats.org/officeDocument/2006/relationships">
-  <p:cSld>
-    <p:spTree>
-      <p:nvGrpSpPr>
-        <p:cNvPr id="1" name=""/>
-        <p:cNvGrpSpPr/>
-        <p:nvPr/>
-      </p:nvGrpSpPr>
-      <p:grpSpPr>
-        <a:xfrm>
-          <a:off x="0" y="0"/>
-          <a:ext cx="0" cy="0"/>
-          <a:chOff x="0" y="0"/>
-          <a:chExt cx="0" cy="0"/>
-        </a:xfrm>
-      </p:grpSpPr>
-      <p:sp>
-        <p:nvSpPr>
-          <p:cNvPr id="2" name="Slide Image Placeholder 1"/>
-          <p:cNvSpPr>
-            <a:spLocks noGrp="1"/>
-          </p:cNvSpPr>
-          <p:nvPr>
-            <p:ph type="sldImg" idx="2"/>
-          </p:nvPr>
-        </p:nvSpPr>
-        <p:spPr/>
-      </p:sp>
-      <p:sp>
-        <p:nvSpPr>
-          <p:cNvPr id="3" name="Notes Placeholder 2"/>
-          <p:cNvSpPr>
-            <a:spLocks noGrp="1"/>
-          </p:cNvSpPr>
-          <p:nvPr>
-            <p:ph type="body" idx="3" sz="quarter"/>
-          </p:nvPr>
-        </p:nvSpPr>
-        <p:spPr/>
-        <p:txBody>
-          <a:bodyPr/>
-          <a:lstStyle/>
-          <a:p>
-            <a:r>
-              <a:t>As Coordinator this is where I would identify first-time tutors for the Week 0 workshop — derived from the records, rather than by asking around.</a:t>
-            </a:r>
-          </a:p>
-        </p:txBody>
-      </p:sp>
-      <p:sp>
-        <p:nvSpPr>
-          <p:cNvPr id="4" name="Slide Number Placeholder 3"/>
-          <p:cNvSpPr>
-            <a:spLocks noGrp="1"/>
-          </p:cNvSpPr>
-          <p:nvPr>
-            <p:ph type="sldNum" idx="5" sz="quarter"/>
-          </p:nvPr>
-        </p:nvSpPr>
-        <p:spPr/>
-      </p:sp>
-    </p:spTree>
-  </p:cSld>
-  <p:clrMapOvr>
-    <a:masterClrMapping/>
-  </p:clrMapOvr>
-</p:notes>
-</file>
-
-<file path=ppt/notesSlides/notesSlide8.xml><?xml version="1.0" encoding="utf-8"?>
-<p:notes xmlns:a="http://schemas.openxmlformats.org/drawingml/2006/main" xmlns:p="http://schemas.openxmlformats.org/presentationml/2006/main" xmlns:r="http://schemas.openxmlformats.org/officeDocument/2006/relationships">
-  <p:cSld>
-    <p:spTree>
-      <p:nvGrpSpPr>
-        <p:cNvPr id="1" name=""/>
-        <p:cNvGrpSpPr/>
-        <p:nvPr/>
-      </p:nvGrpSpPr>
-      <p:grpSpPr>
-        <a:xfrm>
-          <a:off x="0" y="0"/>
-          <a:ext cx="0" cy="0"/>
-          <a:chOff x="0" y="0"/>
-          <a:chExt cx="0" cy="0"/>
-        </a:xfrm>
-      </p:grpSpPr>
-      <p:sp>
-        <p:nvSpPr>
-          <p:cNvPr id="2" name="Slide Image Placeholder 1"/>
-          <p:cNvSpPr>
-            <a:spLocks noGrp="1"/>
-          </p:cNvSpPr>
-          <p:nvPr>
-            <p:ph type="sldImg" idx="2"/>
-          </p:nvPr>
-        </p:nvSpPr>
-        <p:spPr/>
-      </p:sp>
-      <p:sp>
-        <p:nvSpPr>
-          <p:cNvPr id="3" name="Notes Placeholder 2"/>
-          <p:cNvSpPr>
-            <a:spLocks noGrp="1"/>
-          </p:cNvSpPr>
-          <p:nvPr>
-            <p:ph type="body" idx="3" sz="quarter"/>
-          </p:nvPr>
-        </p:nvSpPr>
-        <p:spPr/>
-        <p:txBody>
-          <a:bodyPr/>
-          <a:lstStyle/>
-          <a:p>
-            <a:r>
-              <a:t>Not compliance training: Griffith does that already and repeating it would waste the only three hours the School gets. Not course-specific either — convenors brief their own tutors. This is what is common to all of them.</a:t>
-            </a:r>
-          </a:p>
-        </p:txBody>
-      </p:sp>
-      <p:sp>
-        <p:nvSpPr>
-          <p:cNvPr id="4" name="Slide Number Placeholder 3"/>
-          <p:cNvSpPr>
-            <a:spLocks noGrp="1"/>
-          </p:cNvSpPr>
-          <p:nvPr>
-            <p:ph type="sldNum" idx="5" sz="quarter"/>
-          </p:nvPr>
-        </p:nvSpPr>
-        <p:spPr/>
-      </p:sp>
-    </p:spTree>
-  </p:cSld>
-  <p:clrMapOvr>
-    <a:masterClrMapping/>
-  </p:clrMapOvr>
-</p:notes>
-</file>
-
-<file path=ppt/notesSlides/notesSlide9.xml><?xml version="1.0" encoding="utf-8"?>
-<p:notes xmlns:a="http://schemas.openxmlformats.org/drawingml/2006/main" xmlns:p="http://schemas.openxmlformats.org/presentationml/2006/main" xmlns:r="http://schemas.openxmlformats.org/officeDocument/2006/relationships">
-  <p:cSld>
-    <p:spTree>
-      <p:nvGrpSpPr>
-        <p:cNvPr id="1" name=""/>
-        <p:cNvGrpSpPr/>
-        <p:nvPr/>
-      </p:nvGrpSpPr>
-      <p:grpSpPr>
-        <a:xfrm>
-          <a:off x="0" y="0"/>
-          <a:ext cx="0" cy="0"/>
-          <a:chOff x="0" y="0"/>
-          <a:chExt cx="0" cy="0"/>
-        </a:xfrm>
-      </p:grpSpPr>
-      <p:sp>
-        <p:nvSpPr>
-          <p:cNvPr id="2" name="Slide Image Placeholder 1"/>
-          <p:cNvSpPr>
-            <a:spLocks noGrp="1"/>
-          </p:cNvSpPr>
-          <p:nvPr>
-            <p:ph type="sldImg" idx="2"/>
-          </p:nvPr>
-        </p:nvSpPr>
-        <p:spPr/>
-      </p:sp>
-      <p:sp>
-        <p:nvSpPr>
-          <p:cNvPr id="3" name="Notes Placeholder 2"/>
-          <p:cNvSpPr>
-            <a:spLocks noGrp="1"/>
-          </p:cNvSpPr>
-          <p:nvPr>
-            <p:ph type="body" idx="3" sz="quarter"/>
-          </p:nvPr>
-        </p:nvSpPr>
-        <p:spPr/>
-        <p:txBody>
-          <a:bodyPr/>
-          <a:lstStyle/>
-          <a:p>
-            <a:r>
-              <a:t>Please do open it. The convenor account shows the page that matters most. Everything — proposal, process, workshop run sheet, code of conduct — is at github.com/WWEISONG/griffith-ict-casual-academic</a:t>
-            </a:r>
-          </a:p>
-        </p:txBody>
-      </p:sp>
-      <p:sp>
-        <p:nvSpPr>
-          <p:cNvPr id="4" name="Slide Number Placeholder 3"/>
-          <p:cNvSpPr>
-            <a:spLocks noGrp="1"/>
-          </p:cNvSpPr>
-          <p:nvPr>
-            <p:ph type="sldNum" idx="5" sz="quarter"/>
-          </p:nvPr>
-        </p:nvSpPr>
-        <p:spPr/>
-      </p:sp>
-    </p:spTree>
-  </p:cSld>
-  <p:clrMapOvr>
-    <a:masterClrMapping/>
-  </p:clrMapOvr>
-</p:notes>
 </file>
 
 <file path=ppt/slideLayouts/slideLayout1.xml><?xml version="1.0" encoding="utf-8"?>
@@ -1204,10 +298,9 @@
           <a:lstStyle/>
           <a:p>
             <a:r>
-              <a:rPr lang="en-US" smtClean="0"/>
+              <a:rPr lang="en-US"/>
               <a:t>Click to edit Master title style</a:t>
             </a:r>
-            <a:endParaRPr lang="en-US"/>
           </a:p>
         </p:txBody>
       </p:sp>
@@ -1323,10 +416,9 @@
           </a:lstStyle>
           <a:p>
             <a:r>
-              <a:rPr lang="en-US" smtClean="0"/>
+              <a:rPr lang="en-US"/>
               <a:t>Click to edit Master subtitle style</a:t>
             </a:r>
-            <a:endParaRPr lang="en-US"/>
           </a:p>
         </p:txBody>
       </p:sp>
@@ -1347,7 +439,7 @@
           <a:p>
             <a:fld id="{5BCAD085-E8A6-8845-BD4E-CB4CCA059FC4}" type="datetimeFigureOut">
               <a:rPr lang="en-US" smtClean="0"/>
-              <a:t>1/27/13</a:t>
+              <a:t>9/3/26</a:t>
             </a:fld>
             <a:endParaRPr lang="en-US"/>
           </a:p>
@@ -1441,10 +533,9 @@
           <a:lstStyle/>
           <a:p>
             <a:r>
-              <a:rPr lang="en-US" smtClean="0"/>
+              <a:rPr lang="en-US"/>
               <a:t>Click to edit Master title style</a:t>
             </a:r>
-            <a:endParaRPr lang="en-US"/>
           </a:p>
         </p:txBody>
       </p:sp>
@@ -1465,38 +556,37 @@
           <a:p>
             <a:pPr lvl="0"/>
             <a:r>
-              <a:rPr lang="en-US" smtClean="0"/>
+              <a:rPr lang="en-US"/>
               <a:t>Click to edit Master text styles</a:t>
             </a:r>
           </a:p>
           <a:p>
             <a:pPr lvl="1"/>
             <a:r>
-              <a:rPr lang="en-US" smtClean="0"/>
+              <a:rPr lang="en-US"/>
               <a:t>Second level</a:t>
             </a:r>
           </a:p>
           <a:p>
             <a:pPr lvl="2"/>
             <a:r>
-              <a:rPr lang="en-US" smtClean="0"/>
+              <a:rPr lang="en-US"/>
               <a:t>Third level</a:t>
             </a:r>
           </a:p>
           <a:p>
             <a:pPr lvl="3"/>
             <a:r>
-              <a:rPr lang="en-US" smtClean="0"/>
+              <a:rPr lang="en-US"/>
               <a:t>Fourth level</a:t>
             </a:r>
           </a:p>
           <a:p>
             <a:pPr lvl="4"/>
             <a:r>
-              <a:rPr lang="en-US" smtClean="0"/>
+              <a:rPr lang="en-US"/>
               <a:t>Fifth level</a:t>
             </a:r>
-            <a:endParaRPr lang="en-US"/>
           </a:p>
         </p:txBody>
       </p:sp>
@@ -1517,7 +607,7 @@
           <a:p>
             <a:fld id="{5BCAD085-E8A6-8845-BD4E-CB4CCA059FC4}" type="datetimeFigureOut">
               <a:rPr lang="en-US" smtClean="0"/>
-              <a:t>1/27/13</a:t>
+              <a:t>9/3/26</a:t>
             </a:fld>
             <a:endParaRPr lang="en-US"/>
           </a:p>
@@ -1616,10 +706,9 @@
           <a:lstStyle/>
           <a:p>
             <a:r>
-              <a:rPr lang="en-US" smtClean="0"/>
+              <a:rPr lang="en-US"/>
               <a:t>Click to edit Master title style</a:t>
             </a:r>
-            <a:endParaRPr lang="en-US"/>
           </a:p>
         </p:txBody>
       </p:sp>
@@ -1645,38 +734,37 @@
           <a:p>
             <a:pPr lvl="0"/>
             <a:r>
-              <a:rPr lang="en-US" smtClean="0"/>
+              <a:rPr lang="en-US"/>
               <a:t>Click to edit Master text styles</a:t>
             </a:r>
           </a:p>
           <a:p>
             <a:pPr lvl="1"/>
             <a:r>
-              <a:rPr lang="en-US" smtClean="0"/>
+              <a:rPr lang="en-US"/>
               <a:t>Second level</a:t>
             </a:r>
           </a:p>
           <a:p>
             <a:pPr lvl="2"/>
             <a:r>
-              <a:rPr lang="en-US" smtClean="0"/>
+              <a:rPr lang="en-US"/>
               <a:t>Third level</a:t>
             </a:r>
           </a:p>
           <a:p>
             <a:pPr lvl="3"/>
             <a:r>
-              <a:rPr lang="en-US" smtClean="0"/>
+              <a:rPr lang="en-US"/>
               <a:t>Fourth level</a:t>
             </a:r>
           </a:p>
           <a:p>
             <a:pPr lvl="4"/>
             <a:r>
-              <a:rPr lang="en-US" smtClean="0"/>
+              <a:rPr lang="en-US"/>
               <a:t>Fifth level</a:t>
             </a:r>
-            <a:endParaRPr lang="en-US"/>
           </a:p>
         </p:txBody>
       </p:sp>
@@ -1697,7 +785,7 @@
           <a:p>
             <a:fld id="{5BCAD085-E8A6-8845-BD4E-CB4CCA059FC4}" type="datetimeFigureOut">
               <a:rPr lang="en-US" smtClean="0"/>
-              <a:t>1/27/13</a:t>
+              <a:t>9/3/26</a:t>
             </a:fld>
             <a:endParaRPr lang="en-US"/>
           </a:p>
@@ -1791,10 +879,9 @@
           <a:lstStyle/>
           <a:p>
             <a:r>
-              <a:rPr lang="en-US" smtClean="0"/>
+              <a:rPr lang="en-US"/>
               <a:t>Click to edit Master title style</a:t>
             </a:r>
-            <a:endParaRPr lang="en-US"/>
           </a:p>
         </p:txBody>
       </p:sp>
@@ -1815,38 +902,37 @@
           <a:p>
             <a:pPr lvl="0"/>
             <a:r>
-              <a:rPr lang="en-US" smtClean="0"/>
+              <a:rPr lang="en-US"/>
               <a:t>Click to edit Master text styles</a:t>
             </a:r>
           </a:p>
           <a:p>
             <a:pPr lvl="1"/>
             <a:r>
-              <a:rPr lang="en-US" smtClean="0"/>
+              <a:rPr lang="en-US"/>
               <a:t>Second level</a:t>
             </a:r>
           </a:p>
           <a:p>
             <a:pPr lvl="2"/>
             <a:r>
-              <a:rPr lang="en-US" smtClean="0"/>
+              <a:rPr lang="en-US"/>
               <a:t>Third level</a:t>
             </a:r>
           </a:p>
           <a:p>
             <a:pPr lvl="3"/>
             <a:r>
-              <a:rPr lang="en-US" smtClean="0"/>
+              <a:rPr lang="en-US"/>
               <a:t>Fourth level</a:t>
             </a:r>
           </a:p>
           <a:p>
             <a:pPr lvl="4"/>
             <a:r>
-              <a:rPr lang="en-US" smtClean="0"/>
+              <a:rPr lang="en-US"/>
               <a:t>Fifth level</a:t>
             </a:r>
-            <a:endParaRPr lang="en-US"/>
           </a:p>
         </p:txBody>
       </p:sp>
@@ -1867,7 +953,7 @@
           <a:p>
             <a:fld id="{5BCAD085-E8A6-8845-BD4E-CB4CCA059FC4}" type="datetimeFigureOut">
               <a:rPr lang="en-US" smtClean="0"/>
-              <a:t>1/27/13</a:t>
+              <a:t>9/3/26</a:t>
             </a:fld>
             <a:endParaRPr lang="en-US"/>
           </a:p>
@@ -1970,10 +1056,9 @@
           </a:lstStyle>
           <a:p>
             <a:r>
-              <a:rPr lang="en-US" smtClean="0"/>
+              <a:rPr lang="en-US"/>
               <a:t>Click to edit Master title style</a:t>
             </a:r>
-            <a:endParaRPr lang="en-US"/>
           </a:p>
         </p:txBody>
       </p:sp>
@@ -2090,7 +1175,7 @@
           <a:p>
             <a:pPr lvl="0"/>
             <a:r>
-              <a:rPr lang="en-US" smtClean="0"/>
+              <a:rPr lang="en-US"/>
               <a:t>Click to edit Master text styles</a:t>
             </a:r>
           </a:p>
@@ -2113,7 +1198,7 @@
           <a:p>
             <a:fld id="{5BCAD085-E8A6-8845-BD4E-CB4CCA059FC4}" type="datetimeFigureOut">
               <a:rPr lang="en-US" smtClean="0"/>
-              <a:t>1/27/13</a:t>
+              <a:t>9/3/26</a:t>
             </a:fld>
             <a:endParaRPr lang="en-US"/>
           </a:p>
@@ -2207,10 +1292,9 @@
           <a:lstStyle/>
           <a:p>
             <a:r>
-              <a:rPr lang="en-US" smtClean="0"/>
+              <a:rPr lang="en-US"/>
               <a:t>Click to edit Master title style</a:t>
             </a:r>
-            <a:endParaRPr lang="en-US"/>
           </a:p>
         </p:txBody>
       </p:sp>
@@ -2264,38 +1348,37 @@
           <a:p>
             <a:pPr lvl="0"/>
             <a:r>
-              <a:rPr lang="en-US" smtClean="0"/>
+              <a:rPr lang="en-US"/>
               <a:t>Click to edit Master text styles</a:t>
             </a:r>
           </a:p>
           <a:p>
             <a:pPr lvl="1"/>
             <a:r>
-              <a:rPr lang="en-US" smtClean="0"/>
+              <a:rPr lang="en-US"/>
               <a:t>Second level</a:t>
             </a:r>
           </a:p>
           <a:p>
             <a:pPr lvl="2"/>
             <a:r>
-              <a:rPr lang="en-US" smtClean="0"/>
+              <a:rPr lang="en-US"/>
               <a:t>Third level</a:t>
             </a:r>
           </a:p>
           <a:p>
             <a:pPr lvl="3"/>
             <a:r>
-              <a:rPr lang="en-US" smtClean="0"/>
+              <a:rPr lang="en-US"/>
               <a:t>Fourth level</a:t>
             </a:r>
           </a:p>
           <a:p>
             <a:pPr lvl="4"/>
             <a:r>
-              <a:rPr lang="en-US" smtClean="0"/>
+              <a:rPr lang="en-US"/>
               <a:t>Fifth level</a:t>
             </a:r>
-            <a:endParaRPr lang="en-US"/>
           </a:p>
         </p:txBody>
       </p:sp>
@@ -2349,38 +1432,37 @@
           <a:p>
             <a:pPr lvl="0"/>
             <a:r>
-              <a:rPr lang="en-US" smtClean="0"/>
+              <a:rPr lang="en-US"/>
               <a:t>Click to edit Master text styles</a:t>
             </a:r>
           </a:p>
           <a:p>
             <a:pPr lvl="1"/>
             <a:r>
-              <a:rPr lang="en-US" smtClean="0"/>
+              <a:rPr lang="en-US"/>
               <a:t>Second level</a:t>
             </a:r>
           </a:p>
           <a:p>
             <a:pPr lvl="2"/>
             <a:r>
-              <a:rPr lang="en-US" smtClean="0"/>
+              <a:rPr lang="en-US"/>
               <a:t>Third level</a:t>
             </a:r>
           </a:p>
           <a:p>
             <a:pPr lvl="3"/>
             <a:r>
-              <a:rPr lang="en-US" smtClean="0"/>
+              <a:rPr lang="en-US"/>
               <a:t>Fourth level</a:t>
             </a:r>
           </a:p>
           <a:p>
             <a:pPr lvl="4"/>
             <a:r>
-              <a:rPr lang="en-US" smtClean="0"/>
+              <a:rPr lang="en-US"/>
               <a:t>Fifth level</a:t>
             </a:r>
-            <a:endParaRPr lang="en-US"/>
           </a:p>
         </p:txBody>
       </p:sp>
@@ -2401,7 +1483,7 @@
           <a:p>
             <a:fld id="{5BCAD085-E8A6-8845-BD4E-CB4CCA059FC4}" type="datetimeFigureOut">
               <a:rPr lang="en-US" smtClean="0"/>
-              <a:t>1/27/13</a:t>
+              <a:t>9/3/26</a:t>
             </a:fld>
             <a:endParaRPr lang="en-US"/>
           </a:p>
@@ -2499,10 +1581,9 @@
           </a:lstStyle>
           <a:p>
             <a:r>
-              <a:rPr lang="en-US" smtClean="0"/>
+              <a:rPr lang="en-US"/>
               <a:t>Click to edit Master title style</a:t>
             </a:r>
-            <a:endParaRPr lang="en-US"/>
           </a:p>
         </p:txBody>
       </p:sp>
@@ -2565,7 +1646,7 @@
           <a:p>
             <a:pPr lvl="0"/>
             <a:r>
-              <a:rPr lang="en-US" smtClean="0"/>
+              <a:rPr lang="en-US"/>
               <a:t>Click to edit Master text styles</a:t>
             </a:r>
           </a:p>
@@ -2621,38 +1702,37 @@
           <a:p>
             <a:pPr lvl="0"/>
             <a:r>
-              <a:rPr lang="en-US" smtClean="0"/>
+              <a:rPr lang="en-US"/>
               <a:t>Click to edit Master text styles</a:t>
             </a:r>
           </a:p>
           <a:p>
             <a:pPr lvl="1"/>
             <a:r>
-              <a:rPr lang="en-US" smtClean="0"/>
+              <a:rPr lang="en-US"/>
               <a:t>Second level</a:t>
             </a:r>
           </a:p>
           <a:p>
             <a:pPr lvl="2"/>
             <a:r>
-              <a:rPr lang="en-US" smtClean="0"/>
+              <a:rPr lang="en-US"/>
               <a:t>Third level</a:t>
             </a:r>
           </a:p>
           <a:p>
             <a:pPr lvl="3"/>
             <a:r>
-              <a:rPr lang="en-US" smtClean="0"/>
+              <a:rPr lang="en-US"/>
               <a:t>Fourth level</a:t>
             </a:r>
           </a:p>
           <a:p>
             <a:pPr lvl="4"/>
             <a:r>
-              <a:rPr lang="en-US" smtClean="0"/>
+              <a:rPr lang="en-US"/>
               <a:t>Fifth level</a:t>
             </a:r>
-            <a:endParaRPr lang="en-US"/>
           </a:p>
         </p:txBody>
       </p:sp>
@@ -2715,7 +1795,7 @@
           <a:p>
             <a:pPr lvl="0"/>
             <a:r>
-              <a:rPr lang="en-US" smtClean="0"/>
+              <a:rPr lang="en-US"/>
               <a:t>Click to edit Master text styles</a:t>
             </a:r>
           </a:p>
@@ -2771,38 +1851,37 @@
           <a:p>
             <a:pPr lvl="0"/>
             <a:r>
-              <a:rPr lang="en-US" smtClean="0"/>
+              <a:rPr lang="en-US"/>
               <a:t>Click to edit Master text styles</a:t>
             </a:r>
           </a:p>
           <a:p>
             <a:pPr lvl="1"/>
             <a:r>
-              <a:rPr lang="en-US" smtClean="0"/>
+              <a:rPr lang="en-US"/>
               <a:t>Second level</a:t>
             </a:r>
           </a:p>
           <a:p>
             <a:pPr lvl="2"/>
             <a:r>
-              <a:rPr lang="en-US" smtClean="0"/>
+              <a:rPr lang="en-US"/>
               <a:t>Third level</a:t>
             </a:r>
           </a:p>
           <a:p>
             <a:pPr lvl="3"/>
             <a:r>
-              <a:rPr lang="en-US" smtClean="0"/>
+              <a:rPr lang="en-US"/>
               <a:t>Fourth level</a:t>
             </a:r>
           </a:p>
           <a:p>
             <a:pPr lvl="4"/>
             <a:r>
-              <a:rPr lang="en-US" smtClean="0"/>
+              <a:rPr lang="en-US"/>
               <a:t>Fifth level</a:t>
             </a:r>
-            <a:endParaRPr lang="en-US"/>
           </a:p>
         </p:txBody>
       </p:sp>
@@ -2823,7 +1902,7 @@
           <a:p>
             <a:fld id="{5BCAD085-E8A6-8845-BD4E-CB4CCA059FC4}" type="datetimeFigureOut">
               <a:rPr lang="en-US" smtClean="0"/>
-              <a:t>1/27/13</a:t>
+              <a:t>9/3/26</a:t>
             </a:fld>
             <a:endParaRPr lang="en-US"/>
           </a:p>
@@ -2917,10 +1996,9 @@
           <a:lstStyle/>
           <a:p>
             <a:r>
-              <a:rPr lang="en-US" smtClean="0"/>
+              <a:rPr lang="en-US"/>
               <a:t>Click to edit Master title style</a:t>
             </a:r>
-            <a:endParaRPr lang="en-US"/>
           </a:p>
         </p:txBody>
       </p:sp>
@@ -2941,7 +2019,7 @@
           <a:p>
             <a:fld id="{5BCAD085-E8A6-8845-BD4E-CB4CCA059FC4}" type="datetimeFigureOut">
               <a:rPr lang="en-US" smtClean="0"/>
-              <a:t>1/27/13</a:t>
+              <a:t>9/3/26</a:t>
             </a:fld>
             <a:endParaRPr lang="en-US"/>
           </a:p>
@@ -3036,7 +2114,7 @@
           <a:p>
             <a:fld id="{5BCAD085-E8A6-8845-BD4E-CB4CCA059FC4}" type="datetimeFigureOut">
               <a:rPr lang="en-US" smtClean="0"/>
-              <a:t>1/27/13</a:t>
+              <a:t>9/3/26</a:t>
             </a:fld>
             <a:endParaRPr lang="en-US"/>
           </a:p>
@@ -3139,10 +2217,9 @@
           </a:lstStyle>
           <a:p>
             <a:r>
-              <a:rPr lang="en-US" smtClean="0"/>
+              <a:rPr lang="en-US"/>
               <a:t>Click to edit Master title style</a:t>
             </a:r>
-            <a:endParaRPr lang="en-US"/>
           </a:p>
         </p:txBody>
       </p:sp>
@@ -3196,38 +2273,37 @@
           <a:p>
             <a:pPr lvl="0"/>
             <a:r>
-              <a:rPr lang="en-US" smtClean="0"/>
+              <a:rPr lang="en-US"/>
               <a:t>Click to edit Master text styles</a:t>
             </a:r>
           </a:p>
           <a:p>
             <a:pPr lvl="1"/>
             <a:r>
-              <a:rPr lang="en-US" smtClean="0"/>
+              <a:rPr lang="en-US"/>
               <a:t>Second level</a:t>
             </a:r>
           </a:p>
           <a:p>
             <a:pPr lvl="2"/>
             <a:r>
-              <a:rPr lang="en-US" smtClean="0"/>
+              <a:rPr lang="en-US"/>
               <a:t>Third level</a:t>
             </a:r>
           </a:p>
           <a:p>
             <a:pPr lvl="3"/>
             <a:r>
-              <a:rPr lang="en-US" smtClean="0"/>
+              <a:rPr lang="en-US"/>
               <a:t>Fourth level</a:t>
             </a:r>
           </a:p>
           <a:p>
             <a:pPr lvl="4"/>
             <a:r>
-              <a:rPr lang="en-US" smtClean="0"/>
+              <a:rPr lang="en-US"/>
               <a:t>Fifth level</a:t>
             </a:r>
-            <a:endParaRPr lang="en-US"/>
           </a:p>
         </p:txBody>
       </p:sp>
@@ -3290,7 +2366,7 @@
           <a:p>
             <a:pPr lvl="0"/>
             <a:r>
-              <a:rPr lang="en-US" smtClean="0"/>
+              <a:rPr lang="en-US"/>
               <a:t>Click to edit Master text styles</a:t>
             </a:r>
           </a:p>
@@ -3313,7 +2389,7 @@
           <a:p>
             <a:fld id="{5BCAD085-E8A6-8845-BD4E-CB4CCA059FC4}" type="datetimeFigureOut">
               <a:rPr lang="en-US" smtClean="0"/>
-              <a:t>1/27/13</a:t>
+              <a:t>9/3/26</a:t>
             </a:fld>
             <a:endParaRPr lang="en-US"/>
           </a:p>
@@ -3416,10 +2492,9 @@
           </a:lstStyle>
           <a:p>
             <a:r>
-              <a:rPr lang="en-US" smtClean="0"/>
+              <a:rPr lang="en-US"/>
               <a:t>Click to edit Master title style</a:t>
             </a:r>
-            <a:endParaRPr lang="en-US"/>
           </a:p>
         </p:txBody>
       </p:sp>
@@ -3543,7 +2618,7 @@
           <a:p>
             <a:pPr lvl="0"/>
             <a:r>
-              <a:rPr lang="en-US" smtClean="0"/>
+              <a:rPr lang="en-US"/>
               <a:t>Click to edit Master text styles</a:t>
             </a:r>
           </a:p>
@@ -3566,7 +2641,7 @@
           <a:p>
             <a:fld id="{5BCAD085-E8A6-8845-BD4E-CB4CCA059FC4}" type="datetimeFigureOut">
               <a:rPr lang="en-US" smtClean="0"/>
-              <a:t>1/27/13</a:t>
+              <a:t>9/3/26</a:t>
             </a:fld>
             <a:endParaRPr lang="en-US"/>
           </a:p>
@@ -3675,10 +2750,9 @@
           <a:lstStyle/>
           <a:p>
             <a:r>
-              <a:rPr lang="en-US" smtClean="0"/>
+              <a:rPr lang="en-US"/>
               <a:t>Click to edit Master title style</a:t>
             </a:r>
-            <a:endParaRPr lang="en-US"/>
           </a:p>
         </p:txBody>
       </p:sp>
@@ -3709,38 +2783,37 @@
           <a:p>
             <a:pPr lvl="0"/>
             <a:r>
-              <a:rPr lang="en-US" smtClean="0"/>
+              <a:rPr lang="en-US"/>
               <a:t>Click to edit Master text styles</a:t>
             </a:r>
           </a:p>
           <a:p>
             <a:pPr lvl="1"/>
             <a:r>
-              <a:rPr lang="en-US" smtClean="0"/>
+              <a:rPr lang="en-US"/>
               <a:t>Second level</a:t>
             </a:r>
           </a:p>
           <a:p>
             <a:pPr lvl="2"/>
             <a:r>
-              <a:rPr lang="en-US" smtClean="0"/>
+              <a:rPr lang="en-US"/>
               <a:t>Third level</a:t>
             </a:r>
           </a:p>
           <a:p>
             <a:pPr lvl="3"/>
             <a:r>
-              <a:rPr lang="en-US" smtClean="0"/>
+              <a:rPr lang="en-US"/>
               <a:t>Fourth level</a:t>
             </a:r>
           </a:p>
           <a:p>
             <a:pPr lvl="4"/>
             <a:r>
-              <a:rPr lang="en-US" smtClean="0"/>
+              <a:rPr lang="en-US"/>
               <a:t>Fifth level</a:t>
             </a:r>
-            <a:endParaRPr lang="en-US"/>
           </a:p>
         </p:txBody>
       </p:sp>
@@ -3779,7 +2852,7 @@
           <a:p>
             <a:fld id="{5BCAD085-E8A6-8845-BD4E-CB4CCA059FC4}" type="datetimeFigureOut">
               <a:rPr lang="en-US" smtClean="0"/>
-              <a:t>1/27/13</a:t>
+              <a:t>9/3/26</a:t>
             </a:fld>
             <a:endParaRPr lang="en-US"/>
           </a:p>
@@ -4138,7 +3211,7 @@
 </file>
 
 <file path=ppt/slides/slide1.xml><?xml version="1.0" encoding="utf-8"?>
-<p:sld xmlns:a="http://schemas.openxmlformats.org/drawingml/2006/main" xmlns:p="http://schemas.openxmlformats.org/presentationml/2006/main" xmlns:r="http://schemas.openxmlformats.org/officeDocument/2006/relationships">
+<p:sld xmlns:a="http://schemas.openxmlformats.org/drawingml/2006/main" xmlns:r="http://schemas.openxmlformats.org/officeDocument/2006/relationships" xmlns:p="http://schemas.openxmlformats.org/presentationml/2006/main">
   <p:cSld>
     <p:spTree>
       <p:nvGrpSpPr>
@@ -4146,7 +3219,14 @@
         <p:cNvGrpSpPr/>
         <p:nvPr/>
       </p:nvGrpSpPr>
-      <p:grpSpPr/>
+      <p:grpSpPr>
+        <a:xfrm>
+          <a:off x="0" y="0"/>
+          <a:ext cx="0" cy="0"/>
+          <a:chOff x="0" y="0"/>
+          <a:chExt cx="0" cy="0"/>
+        </a:xfrm>
+      </p:grpSpPr>
       <p:sp>
         <p:nvSpPr>
           <p:cNvPr id="2" name="Rectangle 1"/>
@@ -4188,6 +3268,7 @@
           <a:lstStyle/>
           <a:p>
             <a:pPr algn="ctr"/>
+            <a:endParaRPr/>
           </a:p>
         </p:txBody>
       </p:sp>
@@ -4200,7 +3281,7 @@
           <p:nvPr/>
         </p:nvPicPr>
         <p:blipFill>
-          <a:blip r:embed="rId2"/>
+          <a:blip r:embed="rId3"/>
           <a:stretch>
             <a:fillRect/>
           </a:stretch>
@@ -4224,7 +3305,7 @@
         <p:spPr>
           <a:xfrm>
             <a:off x="347472" y="2560320"/>
-            <a:ext cx="10515600" cy="1463040"/>
+            <a:ext cx="10515600" cy="963405"/>
           </a:xfrm>
           <a:prstGeom prst="rect">
             <a:avLst/>
@@ -4232,7 +3313,7 @@
           <a:noFill/>
         </p:spPr>
         <p:txBody>
-          <a:bodyPr wrap="square" lIns="0" rIns="0" tIns="0" bIns="0">
+          <a:bodyPr wrap="square" lIns="0" tIns="0" rIns="0" bIns="0">
             <a:spAutoFit/>
           </a:bodyPr>
           <a:lstStyle/>
@@ -4249,7 +3330,7 @@
               </a:spcAft>
             </a:pPr>
             <a:r>
-              <a:rPr sz="3100" b="1">
+              <a:rPr sz="3100" b="1" dirty="0">
                 <a:solidFill>
                   <a:srgbClr val="111111"/>
                 </a:solidFill>
@@ -4271,13 +3352,31 @@
               </a:spcAft>
             </a:pPr>
             <a:r>
-              <a:rPr sz="2100" b="0">
+              <a:rPr sz="2100" b="0" dirty="0">
                 <a:solidFill>
                   <a:srgbClr val="595959"/>
                 </a:solidFill>
                 <a:latin typeface="Arial"/>
               </a:rPr>
-              <a:t>A Casual Academic Management System, and the training to go with it</a:t>
+              <a:t>A </a:t>
+            </a:r>
+            <a:r>
+              <a:rPr sz="2100" b="0" dirty="0">
+                <a:solidFill>
+                  <a:srgbClr val="C00000"/>
+                </a:solidFill>
+                <a:latin typeface="Arial"/>
+              </a:rPr>
+              <a:t>Casual Academic Management System</a:t>
+            </a:r>
+            <a:r>
+              <a:rPr sz="2100" b="0" dirty="0">
+                <a:solidFill>
+                  <a:srgbClr val="595959"/>
+                </a:solidFill>
+                <a:latin typeface="Arial"/>
+              </a:rPr>
+              <a:t>, and the training to go with it</a:t>
             </a:r>
           </a:p>
         </p:txBody>
@@ -4323,6 +3422,7 @@
           <a:lstStyle/>
           <a:p>
             <a:pPr algn="ctr"/>
+            <a:endParaRPr/>
           </a:p>
         </p:txBody>
       </p:sp>
@@ -4335,7 +3435,7 @@
         <p:spPr>
           <a:xfrm>
             <a:off x="347472" y="4572000"/>
-            <a:ext cx="10515600" cy="914400"/>
+            <a:ext cx="10515600" cy="340029"/>
           </a:xfrm>
           <a:prstGeom prst="rect">
             <a:avLst/>
@@ -4343,7 +3443,7 @@
           <a:noFill/>
         </p:spPr>
         <p:txBody>
-          <a:bodyPr wrap="square" lIns="0" rIns="0" tIns="0" bIns="0">
+          <a:bodyPr wrap="square" lIns="0" tIns="0" rIns="0" bIns="0">
             <a:spAutoFit/>
           </a:bodyPr>
           <a:lstStyle/>
@@ -4360,36 +3460,20 @@
               </a:spcAft>
             </a:pPr>
             <a:r>
-              <a:rPr sz="2100" b="0">
+              <a:rPr sz="2100" b="0" dirty="0">
                 <a:solidFill>
                   <a:srgbClr val="111111"/>
                 </a:solidFill>
                 <a:latin typeface="Arial"/>
               </a:rPr>
-              <a:t>Wei Song  ·  School of Information and Communication Technology</a:t>
-            </a:r>
-          </a:p>
-          <a:p>
-            <a:pPr algn="l">
-              <a:lnSpc>
-                <a:spcPct val="115000"/>
-              </a:lnSpc>
-              <a:spcBef>
-                <a:spcPts val="0"/>
-              </a:spcBef>
-              <a:spcAft>
-                <a:spcPts val="0"/>
-              </a:spcAft>
-            </a:pPr>
-            <a:r>
-              <a:rPr sz="1400" b="0">
-                <a:solidFill>
-                  <a:srgbClr val="595959"/>
-                </a:solidFill>
-                <a:latin typeface="Arial"/>
-              </a:rPr>
-              <a:t>Proposal to the Head of School  —  September 2026</a:t>
-            </a:r>
+              <a:t>Wei Song</a:t>
+            </a:r>
+            <a:endParaRPr sz="1400" b="0" dirty="0">
+              <a:solidFill>
+                <a:srgbClr val="595959"/>
+              </a:solidFill>
+              <a:latin typeface="Arial"/>
+            </a:endParaRPr>
           </a:p>
         </p:txBody>
       </p:sp>
@@ -4402,7 +3486,7 @@
 </file>
 
 <file path=ppt/slides/slide10.xml><?xml version="1.0" encoding="utf-8"?>
-<p:sld xmlns:a="http://schemas.openxmlformats.org/drawingml/2006/main" xmlns:p="http://schemas.openxmlformats.org/presentationml/2006/main" xmlns:r="http://schemas.openxmlformats.org/officeDocument/2006/relationships">
+<p:sld xmlns:a="http://schemas.openxmlformats.org/drawingml/2006/main" xmlns:r="http://schemas.openxmlformats.org/officeDocument/2006/relationships" xmlns:p="http://schemas.openxmlformats.org/presentationml/2006/main">
   <p:cSld>
     <p:spTree>
       <p:nvGrpSpPr>
@@ -4410,7 +3494,14 @@
         <p:cNvGrpSpPr/>
         <p:nvPr/>
       </p:nvGrpSpPr>
-      <p:grpSpPr/>
+      <p:grpSpPr>
+        <a:xfrm>
+          <a:off x="0" y="0"/>
+          <a:ext cx="0" cy="0"/>
+          <a:chOff x="0" y="0"/>
+          <a:chExt cx="0" cy="0"/>
+        </a:xfrm>
+      </p:grpSpPr>
       <p:sp>
         <p:nvSpPr>
           <p:cNvPr id="2" name="TextBox 1"/>
@@ -4428,7 +3519,7 @@
           <a:noFill/>
         </p:spPr>
         <p:txBody>
-          <a:bodyPr wrap="square" lIns="0" rIns="0" tIns="0" bIns="0">
+          <a:bodyPr wrap="square" lIns="0" tIns="0" rIns="0" bIns="0">
             <a:spAutoFit/>
           </a:bodyPr>
           <a:lstStyle/>
@@ -4497,6 +3588,7 @@
           <a:lstStyle/>
           <a:p>
             <a:pPr algn="ctr"/>
+            <a:endParaRPr/>
           </a:p>
         </p:txBody>
       </p:sp>
@@ -4509,7 +3601,7 @@
           <p:nvPr/>
         </p:nvPicPr>
         <p:blipFill>
-          <a:blip r:embed="rId2"/>
+          <a:blip r:embed="rId3"/>
           <a:stretch>
             <a:fillRect/>
           </a:stretch>
@@ -4541,7 +3633,7 @@
           <a:noFill/>
         </p:spPr>
         <p:txBody>
-          <a:bodyPr wrap="square" lIns="0" rIns="0" tIns="0" bIns="0">
+          <a:bodyPr wrap="square" lIns="0" tIns="0" rIns="0" bIns="0">
             <a:spAutoFit/>
           </a:bodyPr>
           <a:lstStyle/>
@@ -4610,6 +3702,7 @@
           <a:lstStyle/>
           <a:p>
             <a:pPr algn="ctr"/>
+            <a:endParaRPr/>
           </a:p>
         </p:txBody>
       </p:sp>
@@ -4654,6 +3747,7 @@
           <a:lstStyle/>
           <a:p>
             <a:pPr algn="ctr"/>
+            <a:endParaRPr/>
           </a:p>
         </p:txBody>
       </p:sp>
@@ -4698,6 +3792,7 @@
           <a:lstStyle/>
           <a:p>
             <a:pPr algn="ctr"/>
+            <a:endParaRPr/>
           </a:p>
         </p:txBody>
       </p:sp>
@@ -4742,6 +3837,7 @@
           <a:lstStyle/>
           <a:p>
             <a:pPr algn="ctr"/>
+            <a:endParaRPr/>
           </a:p>
         </p:txBody>
       </p:sp>
@@ -4786,6 +3882,7 @@
           <a:lstStyle/>
           <a:p>
             <a:pPr algn="ctr"/>
+            <a:endParaRPr/>
           </a:p>
         </p:txBody>
       </p:sp>
@@ -4830,6 +3927,7 @@
           <a:lstStyle/>
           <a:p>
             <a:pPr algn="ctr"/>
+            <a:endParaRPr/>
           </a:p>
         </p:txBody>
       </p:sp>
@@ -4876,6 +3974,7 @@
           <a:lstStyle/>
           <a:p>
             <a:pPr algn="ctr"/>
+            <a:endParaRPr/>
           </a:p>
         </p:txBody>
       </p:sp>
@@ -4920,6 +4019,7 @@
           <a:lstStyle/>
           <a:p>
             <a:pPr algn="ctr"/>
+            <a:endParaRPr/>
           </a:p>
         </p:txBody>
       </p:sp>
@@ -4940,7 +4040,7 @@
           <a:noFill/>
         </p:spPr>
         <p:txBody>
-          <a:bodyPr wrap="square" lIns="0" rIns="0" tIns="0" bIns="0">
+          <a:bodyPr wrap="square" lIns="0" tIns="0" rIns="0" bIns="0">
             <a:spAutoFit/>
           </a:bodyPr>
           <a:lstStyle/>
@@ -4985,7 +4085,7 @@
           <a:noFill/>
         </p:spPr>
         <p:txBody>
-          <a:bodyPr wrap="square" lIns="0" rIns="0" tIns="0" bIns="0">
+          <a:bodyPr wrap="square" lIns="0" tIns="0" rIns="0" bIns="0">
             <a:spAutoFit/>
           </a:bodyPr>
           <a:lstStyle/>
@@ -5078,6 +4178,7 @@
           <a:lstStyle/>
           <a:p>
             <a:pPr algn="ctr"/>
+            <a:endParaRPr/>
           </a:p>
         </p:txBody>
       </p:sp>
@@ -5122,6 +4223,7 @@
           <a:lstStyle/>
           <a:p>
             <a:pPr algn="ctr"/>
+            <a:endParaRPr/>
           </a:p>
         </p:txBody>
       </p:sp>
@@ -5142,7 +4244,7 @@
           <a:noFill/>
         </p:spPr>
         <p:txBody>
-          <a:bodyPr wrap="square" lIns="0" rIns="0" tIns="0" bIns="0">
+          <a:bodyPr wrap="square" lIns="0" tIns="0" rIns="0" bIns="0">
             <a:spAutoFit/>
           </a:bodyPr>
           <a:lstStyle/>
@@ -5187,7 +4289,7 @@
           <a:noFill/>
         </p:spPr>
         <p:txBody>
-          <a:bodyPr wrap="square" lIns="0" rIns="0" tIns="0" bIns="0">
+          <a:bodyPr wrap="square" lIns="0" tIns="0" rIns="0" bIns="0">
             <a:spAutoFit/>
           </a:bodyPr>
           <a:lstStyle/>
@@ -5280,6 +4382,7 @@
           <a:lstStyle/>
           <a:p>
             <a:pPr algn="ctr"/>
+            <a:endParaRPr/>
           </a:p>
         </p:txBody>
       </p:sp>
@@ -5324,6 +4427,7 @@
           <a:lstStyle/>
           <a:p>
             <a:pPr algn="ctr"/>
+            <a:endParaRPr/>
           </a:p>
         </p:txBody>
       </p:sp>
@@ -5344,7 +4448,7 @@
           <a:noFill/>
         </p:spPr>
         <p:txBody>
-          <a:bodyPr wrap="square" lIns="0" rIns="0" tIns="0" bIns="0">
+          <a:bodyPr wrap="square" lIns="0" tIns="0" rIns="0" bIns="0">
             <a:spAutoFit/>
           </a:bodyPr>
           <a:lstStyle/>
@@ -5389,7 +4493,7 @@
           <a:noFill/>
         </p:spPr>
         <p:txBody>
-          <a:bodyPr wrap="square" lIns="0" rIns="0" tIns="0" bIns="0">
+          <a:bodyPr wrap="square" lIns="0" tIns="0" rIns="0" bIns="0">
             <a:spAutoFit/>
           </a:bodyPr>
           <a:lstStyle/>
@@ -5482,6 +4586,7 @@
           <a:lstStyle/>
           <a:p>
             <a:pPr algn="ctr"/>
+            <a:endParaRPr/>
           </a:p>
         </p:txBody>
       </p:sp>
@@ -5526,6 +4631,7 @@
           <a:lstStyle/>
           <a:p>
             <a:pPr algn="ctr"/>
+            <a:endParaRPr/>
           </a:p>
         </p:txBody>
       </p:sp>
@@ -5546,7 +4652,7 @@
           <a:noFill/>
         </p:spPr>
         <p:txBody>
-          <a:bodyPr wrap="square" lIns="0" rIns="0" tIns="0" bIns="0">
+          <a:bodyPr wrap="square" lIns="0" tIns="0" rIns="0" bIns="0">
             <a:spAutoFit/>
           </a:bodyPr>
           <a:lstStyle/>
@@ -5591,7 +4697,7 @@
           <a:noFill/>
         </p:spPr>
         <p:txBody>
-          <a:bodyPr wrap="square" lIns="0" rIns="0" tIns="0" bIns="0">
+          <a:bodyPr wrap="square" lIns="0" tIns="0" rIns="0" bIns="0">
             <a:spAutoFit/>
           </a:bodyPr>
           <a:lstStyle/>
@@ -5684,6 +4790,7 @@
           <a:lstStyle/>
           <a:p>
             <a:pPr algn="ctr"/>
+            <a:endParaRPr/>
           </a:p>
         </p:txBody>
       </p:sp>
@@ -5728,6 +4835,7 @@
           <a:lstStyle/>
           <a:p>
             <a:pPr algn="ctr"/>
+            <a:endParaRPr/>
           </a:p>
         </p:txBody>
       </p:sp>
@@ -5748,7 +4856,7 @@
           <a:noFill/>
         </p:spPr>
         <p:txBody>
-          <a:bodyPr wrap="square" lIns="0" rIns="0" tIns="0" bIns="0">
+          <a:bodyPr wrap="square" lIns="0" tIns="0" rIns="0" bIns="0">
             <a:spAutoFit/>
           </a:bodyPr>
           <a:lstStyle/>
@@ -5793,7 +4901,7 @@
           <a:noFill/>
         </p:spPr>
         <p:txBody>
-          <a:bodyPr wrap="square" lIns="0" rIns="0" tIns="0" bIns="0">
+          <a:bodyPr wrap="square" lIns="0" tIns="0" rIns="0" bIns="0">
             <a:spAutoFit/>
           </a:bodyPr>
           <a:lstStyle/>
@@ -5884,6 +4992,7 @@
           <a:lstStyle/>
           <a:p>
             <a:pPr algn="ctr"/>
+            <a:endParaRPr/>
           </a:p>
         </p:txBody>
       </p:sp>
@@ -5904,7 +5013,7 @@
           <a:noFill/>
         </p:spPr>
         <p:txBody>
-          <a:bodyPr wrap="square" lIns="0" rIns="0" tIns="0" bIns="0">
+          <a:bodyPr wrap="square" lIns="0" tIns="0" rIns="0" bIns="0">
             <a:spAutoFit/>
           </a:bodyPr>
           <a:lstStyle/>
@@ -5979,7 +5088,7 @@
           <a:noFill/>
         </p:spPr>
         <p:txBody>
-          <a:bodyPr wrap="square" lIns="0" rIns="0" tIns="0" bIns="0">
+          <a:bodyPr wrap="square" lIns="0" tIns="0" rIns="0" bIns="0">
             <a:spAutoFit/>
           </a:bodyPr>
           <a:lstStyle/>
@@ -6016,7 +5125,7 @@
 </file>
 
 <file path=ppt/slides/slide2.xml><?xml version="1.0" encoding="utf-8"?>
-<p:sld xmlns:a="http://schemas.openxmlformats.org/drawingml/2006/main" xmlns:p="http://schemas.openxmlformats.org/presentationml/2006/main" xmlns:r="http://schemas.openxmlformats.org/officeDocument/2006/relationships">
+<p:sld xmlns:a="http://schemas.openxmlformats.org/drawingml/2006/main" xmlns:r="http://schemas.openxmlformats.org/officeDocument/2006/relationships" xmlns:p="http://schemas.openxmlformats.org/presentationml/2006/main">
   <p:cSld>
     <p:spTree>
       <p:nvGrpSpPr>
@@ -6024,7 +5133,14 @@
         <p:cNvGrpSpPr/>
         <p:nvPr/>
       </p:nvGrpSpPr>
-      <p:grpSpPr/>
+      <p:grpSpPr>
+        <a:xfrm>
+          <a:off x="0" y="0"/>
+          <a:ext cx="0" cy="0"/>
+          <a:chOff x="0" y="0"/>
+          <a:chExt cx="0" cy="0"/>
+        </a:xfrm>
+      </p:grpSpPr>
       <p:sp>
         <p:nvSpPr>
           <p:cNvPr id="2" name="TextBox 1"/>
@@ -6034,7 +5150,7 @@
         <p:spPr>
           <a:xfrm>
             <a:off x="347472" y="73152"/>
-            <a:ext cx="9052560" cy="868680"/>
+            <a:ext cx="9593970" cy="492314"/>
           </a:xfrm>
           <a:prstGeom prst="rect">
             <a:avLst/>
@@ -6042,7 +5158,7 @@
           <a:noFill/>
         </p:spPr>
         <p:txBody>
-          <a:bodyPr wrap="square" lIns="0" rIns="0" tIns="0" bIns="0">
+          <a:bodyPr wrap="square" lIns="0" tIns="0" rIns="0" bIns="0">
             <a:spAutoFit/>
           </a:bodyPr>
           <a:lstStyle/>
@@ -6059,13 +5175,25 @@
               </a:spcAft>
             </a:pPr>
             <a:r>
-              <a:rPr sz="3200" b="1">
+              <a:rPr sz="3200" b="1" dirty="0">
                 <a:solidFill>
                   <a:srgbClr val="111111"/>
                 </a:solidFill>
                 <a:latin typeface="Arial"/>
               </a:rPr>
-              <a:t>Why the School Needs a Casual Academic Pool</a:t>
+              <a:t>Why the School Needs a </a:t>
+            </a:r>
+            <a:r>
+              <a:rPr sz="3200" b="1" dirty="0">
+                <a:solidFill>
+                  <a:schemeClr val="tx2">
+                    <a:lumMod val="60000"/>
+                    <a:lumOff val="40000"/>
+                  </a:schemeClr>
+                </a:solidFill>
+                <a:latin typeface="Arial"/>
+              </a:rPr>
+              <a:t>Casual Academic Pool</a:t>
             </a:r>
           </a:p>
         </p:txBody>
@@ -6111,6 +5239,7 @@
           <a:lstStyle/>
           <a:p>
             <a:pPr algn="ctr"/>
+            <a:endParaRPr/>
           </a:p>
         </p:txBody>
       </p:sp>
@@ -6123,7 +5252,7 @@
           <p:nvPr/>
         </p:nvPicPr>
         <p:blipFill>
-          <a:blip r:embed="rId2"/>
+          <a:blip r:embed="rId3"/>
           <a:stretch>
             <a:fillRect/>
           </a:stretch>
@@ -6155,7 +5284,7 @@
           <a:noFill/>
         </p:spPr>
         <p:txBody>
-          <a:bodyPr wrap="square" lIns="0" rIns="0" tIns="0" bIns="0">
+          <a:bodyPr wrap="square" lIns="0" tIns="0" rIns="0" bIns="0">
             <a:spAutoFit/>
           </a:bodyPr>
           <a:lstStyle/>
@@ -6200,7 +5329,7 @@
           <a:noFill/>
         </p:spPr>
         <p:txBody>
-          <a:bodyPr wrap="square" lIns="0" rIns="0" tIns="0" bIns="0">
+          <a:bodyPr wrap="square" lIns="0" tIns="0" rIns="0" bIns="0">
             <a:spAutoFit/>
           </a:bodyPr>
           <a:lstStyle/>
@@ -6245,7 +5374,7 @@
           <a:noFill/>
         </p:spPr>
         <p:txBody>
-          <a:bodyPr wrap="square" lIns="0" rIns="0" tIns="0" bIns="0">
+          <a:bodyPr wrap="square" lIns="0" tIns="0" rIns="0" bIns="0">
             <a:spAutoFit/>
           </a:bodyPr>
           <a:lstStyle/>
@@ -6262,7 +5391,7 @@
               </a:spcAft>
             </a:pPr>
             <a:r>
-              <a:rPr sz="1000" b="1">
+              <a:rPr sz="1000" b="1" dirty="0">
                 <a:solidFill>
                   <a:srgbClr val="C00000"/>
                 </a:solidFill>
@@ -6316,6 +5445,7 @@
           <a:lstStyle/>
           <a:p>
             <a:pPr algn="ctr"/>
+            <a:endParaRPr/>
           </a:p>
         </p:txBody>
       </p:sp>
@@ -6336,7 +5466,7 @@
           <a:noFill/>
         </p:spPr>
         <p:txBody>
-          <a:bodyPr wrap="square" lIns="0" rIns="0" tIns="0" bIns="0">
+          <a:bodyPr wrap="square" lIns="0" tIns="0" rIns="0" bIns="0">
             <a:spAutoFit/>
           </a:bodyPr>
           <a:lstStyle/>
@@ -6405,6 +5535,7 @@
           <a:lstStyle/>
           <a:p>
             <a:pPr algn="ctr"/>
+            <a:endParaRPr/>
           </a:p>
         </p:txBody>
       </p:sp>
@@ -6451,6 +5582,7 @@
           <a:lstStyle/>
           <a:p>
             <a:pPr algn="ctr"/>
+            <a:endParaRPr/>
           </a:p>
         </p:txBody>
       </p:sp>
@@ -6471,7 +5603,7 @@
           <a:noFill/>
         </p:spPr>
         <p:txBody>
-          <a:bodyPr wrap="square" lIns="0" rIns="0" tIns="0" bIns="0">
+          <a:bodyPr wrap="square" lIns="0" tIns="0" rIns="0" bIns="0">
             <a:spAutoFit/>
           </a:bodyPr>
           <a:lstStyle/>
@@ -6542,6 +5674,7 @@
           <a:lstStyle/>
           <a:p>
             <a:pPr algn="ctr"/>
+            <a:endParaRPr/>
           </a:p>
         </p:txBody>
       </p:sp>
@@ -6562,7 +5695,7 @@
           <a:noFill/>
         </p:spPr>
         <p:txBody>
-          <a:bodyPr wrap="square" lIns="0" rIns="0" tIns="0" bIns="0">
+          <a:bodyPr wrap="square" lIns="0" tIns="0" rIns="0" bIns="0">
             <a:spAutoFit/>
           </a:bodyPr>
           <a:lstStyle/>
@@ -6633,6 +5766,7 @@
           <a:lstStyle/>
           <a:p>
             <a:pPr algn="ctr"/>
+            <a:endParaRPr/>
           </a:p>
         </p:txBody>
       </p:sp>
@@ -6653,7 +5787,7 @@
           <a:noFill/>
         </p:spPr>
         <p:txBody>
-          <a:bodyPr wrap="square" lIns="0" rIns="0" tIns="0" bIns="0">
+          <a:bodyPr wrap="square" lIns="0" tIns="0" rIns="0" bIns="0">
             <a:spAutoFit/>
           </a:bodyPr>
           <a:lstStyle/>
@@ -6722,6 +5856,7 @@
           <a:lstStyle/>
           <a:p>
             <a:pPr algn="ctr"/>
+            <a:endParaRPr/>
           </a:p>
         </p:txBody>
       </p:sp>
@@ -6768,6 +5903,7 @@
           <a:lstStyle/>
           <a:p>
             <a:pPr algn="ctr"/>
+            <a:endParaRPr/>
           </a:p>
         </p:txBody>
       </p:sp>
@@ -6788,7 +5924,7 @@
           <a:noFill/>
         </p:spPr>
         <p:txBody>
-          <a:bodyPr wrap="square" lIns="0" rIns="0" tIns="0" bIns="0">
+          <a:bodyPr wrap="square" lIns="0" tIns="0" rIns="0" bIns="0">
             <a:spAutoFit/>
           </a:bodyPr>
           <a:lstStyle/>
@@ -6859,6 +5995,7 @@
           <a:lstStyle/>
           <a:p>
             <a:pPr algn="ctr"/>
+            <a:endParaRPr/>
           </a:p>
         </p:txBody>
       </p:sp>
@@ -6879,7 +6016,7 @@
           <a:noFill/>
         </p:spPr>
         <p:txBody>
-          <a:bodyPr wrap="square" lIns="0" rIns="0" tIns="0" bIns="0">
+          <a:bodyPr wrap="square" lIns="0" tIns="0" rIns="0" bIns="0">
             <a:spAutoFit/>
           </a:bodyPr>
           <a:lstStyle/>
@@ -6948,6 +6085,7 @@
           <a:lstStyle/>
           <a:p>
             <a:pPr algn="ctr"/>
+            <a:endParaRPr/>
           </a:p>
         </p:txBody>
       </p:sp>
@@ -6992,6 +6130,7 @@
           <a:lstStyle/>
           <a:p>
             <a:pPr algn="ctr"/>
+            <a:endParaRPr/>
           </a:p>
         </p:txBody>
       </p:sp>
@@ -7012,7 +6151,7 @@
           <a:noFill/>
         </p:spPr>
         <p:txBody>
-          <a:bodyPr wrap="square" lIns="0" rIns="0" tIns="0" bIns="0">
+          <a:bodyPr wrap="square" lIns="0" tIns="0" rIns="0" bIns="0">
             <a:spAutoFit/>
           </a:bodyPr>
           <a:lstStyle/>
@@ -7103,6 +6242,7 @@
           <a:lstStyle/>
           <a:p>
             <a:pPr algn="ctr"/>
+            <a:endParaRPr/>
           </a:p>
         </p:txBody>
       </p:sp>
@@ -7149,6 +6289,7 @@
           <a:lstStyle/>
           <a:p>
             <a:pPr algn="ctr"/>
+            <a:endParaRPr/>
           </a:p>
         </p:txBody>
       </p:sp>
@@ -7169,7 +6310,7 @@
           <a:noFill/>
         </p:spPr>
         <p:txBody>
-          <a:bodyPr wrap="square" lIns="0" rIns="0" tIns="0" bIns="0">
+          <a:bodyPr wrap="square" lIns="0" tIns="0" rIns="0" bIns="0">
             <a:spAutoFit/>
           </a:bodyPr>
           <a:lstStyle/>
@@ -7214,7 +6355,7 @@
           <a:noFill/>
         </p:spPr>
         <p:txBody>
-          <a:bodyPr wrap="square" lIns="0" rIns="0" tIns="0" bIns="0">
+          <a:bodyPr wrap="square" lIns="0" tIns="0" rIns="0" bIns="0">
             <a:spAutoFit/>
           </a:bodyPr>
           <a:lstStyle/>
@@ -7259,7 +6400,7 @@
           <a:noFill/>
         </p:spPr>
         <p:txBody>
-          <a:bodyPr wrap="square" lIns="0" rIns="0" tIns="0" bIns="0">
+          <a:bodyPr wrap="square" lIns="0" tIns="0" rIns="0" bIns="0">
             <a:spAutoFit/>
           </a:bodyPr>
           <a:lstStyle/>
@@ -7296,7 +6437,7 @@
 </file>
 
 <file path=ppt/slides/slide3.xml><?xml version="1.0" encoding="utf-8"?>
-<p:sld xmlns:a="http://schemas.openxmlformats.org/drawingml/2006/main" xmlns:p="http://schemas.openxmlformats.org/presentationml/2006/main" xmlns:r="http://schemas.openxmlformats.org/officeDocument/2006/relationships">
+<p:sld xmlns:a="http://schemas.openxmlformats.org/drawingml/2006/main" xmlns:r="http://schemas.openxmlformats.org/officeDocument/2006/relationships" xmlns:p="http://schemas.openxmlformats.org/presentationml/2006/main">
   <p:cSld>
     <p:spTree>
       <p:nvGrpSpPr>
@@ -7304,7 +6445,14 @@
         <p:cNvGrpSpPr/>
         <p:nvPr/>
       </p:nvGrpSpPr>
-      <p:grpSpPr/>
+      <p:grpSpPr>
+        <a:xfrm>
+          <a:off x="0" y="0"/>
+          <a:ext cx="0" cy="0"/>
+          <a:chOff x="0" y="0"/>
+          <a:chExt cx="0" cy="0"/>
+        </a:xfrm>
+      </p:grpSpPr>
       <p:sp>
         <p:nvSpPr>
           <p:cNvPr id="2" name="TextBox 1"/>
@@ -7314,7 +6462,7 @@
         <p:spPr>
           <a:xfrm>
             <a:off x="347472" y="73152"/>
-            <a:ext cx="9052560" cy="868680"/>
+            <a:ext cx="9052560" cy="492314"/>
           </a:xfrm>
           <a:prstGeom prst="rect">
             <a:avLst/>
@@ -7322,7 +6470,7 @@
           <a:noFill/>
         </p:spPr>
         <p:txBody>
-          <a:bodyPr wrap="square" lIns="0" rIns="0" tIns="0" bIns="0">
+          <a:bodyPr wrap="square" lIns="0" tIns="0" rIns="0" bIns="0">
             <a:spAutoFit/>
           </a:bodyPr>
           <a:lstStyle/>
@@ -7339,13 +6487,31 @@
               </a:spcAft>
             </a:pPr>
             <a:r>
-              <a:rPr sz="3200" b="1">
+              <a:rPr sz="3200" b="1" dirty="0">
                 <a:solidFill>
                   <a:srgbClr val="111111"/>
                 </a:solidFill>
                 <a:latin typeface="Arial"/>
               </a:rPr>
-              <a:t>A Tutor Pool for the School</a:t>
+              <a:t>A </a:t>
+            </a:r>
+            <a:r>
+              <a:rPr sz="3200" b="1" dirty="0">
+                <a:solidFill>
+                  <a:srgbClr val="C00000"/>
+                </a:solidFill>
+                <a:latin typeface="Arial"/>
+              </a:rPr>
+              <a:t>Tutor Pool </a:t>
+            </a:r>
+            <a:r>
+              <a:rPr sz="3200" b="1" dirty="0">
+                <a:solidFill>
+                  <a:srgbClr val="111111"/>
+                </a:solidFill>
+                <a:latin typeface="Arial"/>
+              </a:rPr>
+              <a:t>for the School</a:t>
             </a:r>
           </a:p>
         </p:txBody>
@@ -7391,81 +6557,13 @@
           <a:lstStyle/>
           <a:p>
             <a:pPr algn="ctr"/>
+            <a:endParaRPr/>
           </a:p>
         </p:txBody>
       </p:sp>
       <p:pic>
         <p:nvPicPr>
           <p:cNvPr id="4" name="Picture 3" descr="cap-logo.png"/>
-          <p:cNvPicPr>
-            <a:picLocks noChangeAspect="1"/>
-          </p:cNvPicPr>
-          <p:nvPr/>
-        </p:nvPicPr>
-        <p:blipFill>
-          <a:blip r:embed="rId2"/>
-          <a:stretch>
-            <a:fillRect/>
-          </a:stretch>
-        </p:blipFill>
-        <p:spPr>
-          <a:xfrm>
-            <a:off x="11475720" y="237744"/>
-            <a:ext cx="566928" cy="566928"/>
-          </a:xfrm>
-          <a:prstGeom prst="rect">
-            <a:avLst/>
-          </a:prstGeom>
-        </p:spPr>
-      </p:pic>
-      <p:sp>
-        <p:nvSpPr>
-          <p:cNvPr id="5" name="TextBox 4"/>
-          <p:cNvSpPr txBox="1"/>
-          <p:nvPr/>
-        </p:nvSpPr>
-        <p:spPr>
-          <a:xfrm>
-            <a:off x="347472" y="1188720"/>
-            <a:ext cx="11521440" cy="457200"/>
-          </a:xfrm>
-          <a:prstGeom prst="rect">
-            <a:avLst/>
-          </a:prstGeom>
-          <a:noFill/>
-        </p:spPr>
-        <p:txBody>
-          <a:bodyPr wrap="square" lIns="0" rIns="0" tIns="0" bIns="0">
-            <a:spAutoFit/>
-          </a:bodyPr>
-          <a:lstStyle/>
-          <a:p>
-            <a:pPr algn="l">
-              <a:lnSpc>
-                <a:spcPct val="125000"/>
-              </a:lnSpc>
-              <a:spcBef>
-                <a:spcPts val="0"/>
-              </a:spcBef>
-              <a:spcAft>
-                <a:spcPts val="0"/>
-              </a:spcAft>
-            </a:pPr>
-            <a:r>
-              <a:rPr sz="1700" b="0">
-                <a:solidFill>
-                  <a:srgbClr val="595959"/>
-                </a:solidFill>
-                <a:latin typeface="Arial"/>
-              </a:rPr>
-              <a:t>Built and deployed. One place where senior students put themselves forward, and convenors find out who can teach their course.</a:t>
-            </a:r>
-          </a:p>
-        </p:txBody>
-      </p:sp>
-      <p:pic>
-        <p:nvPicPr>
-          <p:cNvPr id="6" name="Picture 5" descr="00-entrance-candidate.png"/>
           <p:cNvPicPr>
             <a:picLocks noChangeAspect="1"/>
           </p:cNvPicPr>
@@ -7479,6 +6577,30 @@
         </p:blipFill>
         <p:spPr>
           <a:xfrm>
+            <a:off x="11475720" y="237744"/>
+            <a:ext cx="566928" cy="566928"/>
+          </a:xfrm>
+          <a:prstGeom prst="rect">
+            <a:avLst/>
+          </a:prstGeom>
+        </p:spPr>
+      </p:pic>
+      <p:pic>
+        <p:nvPicPr>
+          <p:cNvPr id="6" name="Picture 5" descr="00-entrance-candidate.png"/>
+          <p:cNvPicPr>
+            <a:picLocks noChangeAspect="1"/>
+          </p:cNvPicPr>
+          <p:nvPr/>
+        </p:nvPicPr>
+        <p:blipFill>
+          <a:blip r:embed="rId4"/>
+          <a:stretch>
+            <a:fillRect/>
+          </a:stretch>
+        </p:blipFill>
+        <p:spPr>
+          <a:xfrm>
             <a:off x="822960" y="1755648"/>
             <a:ext cx="4937760" cy="3086100"/>
           </a:xfrm>
@@ -7528,6 +6650,7 @@
           <a:lstStyle/>
           <a:p>
             <a:pPr algn="ctr"/>
+            <a:endParaRPr/>
           </a:p>
         </p:txBody>
       </p:sp>
@@ -7540,7 +6663,7 @@
           <p:nvPr/>
         </p:nvPicPr>
         <p:blipFill>
-          <a:blip r:embed="rId4"/>
+          <a:blip r:embed="rId5"/>
           <a:stretch>
             <a:fillRect/>
           </a:stretch>
@@ -7596,6 +6719,7 @@
           <a:lstStyle/>
           <a:p>
             <a:pPr algn="ctr"/>
+            <a:endParaRPr/>
           </a:p>
         </p:txBody>
       </p:sp>
@@ -7608,7 +6732,7 @@
         <p:spPr>
           <a:xfrm>
             <a:off x="822960" y="5001768"/>
-            <a:ext cx="4937760" cy="365760"/>
+            <a:ext cx="4937760" cy="226665"/>
           </a:xfrm>
           <a:prstGeom prst="rect">
             <a:avLst/>
@@ -7616,7 +6740,7 @@
           <a:noFill/>
         </p:spPr>
         <p:txBody>
-          <a:bodyPr wrap="square" lIns="0" rIns="0" tIns="0" bIns="0">
+          <a:bodyPr wrap="square" lIns="0" tIns="0" rIns="0" bIns="0">
             <a:spAutoFit/>
           </a:bodyPr>
           <a:lstStyle/>
@@ -7633,14 +6757,38 @@
               </a:spcAft>
             </a:pPr>
             <a:r>
-              <a:rPr sz="1250" b="1">
+              <a:rPr sz="1400" b="1" dirty="0">
+                <a:solidFill>
+                  <a:srgbClr val="C00000"/>
+                </a:solidFill>
+                <a:latin typeface="Arial"/>
+              </a:rPr>
+              <a:t>Candidates</a:t>
+            </a:r>
+            <a:r>
+              <a:rPr sz="1400" b="1" dirty="0">
                 <a:solidFill>
                   <a:srgbClr val="595959"/>
                 </a:solidFill>
                 <a:latin typeface="Arial"/>
               </a:rPr>
-              <a:t>Candidates have their own link</a:t>
-            </a:r>
+              <a:t> have their own </a:t>
+            </a:r>
+            <a:r>
+              <a:rPr lang="en-US" altLang="zh-CN" sz="1400" b="1" dirty="0">
+                <a:solidFill>
+                  <a:srgbClr val="595959"/>
+                </a:solidFill>
+                <a:latin typeface="Arial"/>
+              </a:rPr>
+              <a:t>portal</a:t>
+            </a:r>
+            <a:endParaRPr sz="1400" b="1" dirty="0">
+              <a:solidFill>
+                <a:srgbClr val="595959"/>
+              </a:solidFill>
+              <a:latin typeface="Arial"/>
+            </a:endParaRPr>
           </a:p>
         </p:txBody>
       </p:sp>
@@ -7653,7 +6801,7 @@
         <p:spPr>
           <a:xfrm>
             <a:off x="6400800" y="5001768"/>
-            <a:ext cx="4937760" cy="365760"/>
+            <a:ext cx="4937760" cy="226665"/>
           </a:xfrm>
           <a:prstGeom prst="rect">
             <a:avLst/>
@@ -7661,7 +6809,7 @@
           <a:noFill/>
         </p:spPr>
         <p:txBody>
-          <a:bodyPr wrap="square" lIns="0" rIns="0" tIns="0" bIns="0">
+          <a:bodyPr wrap="square" lIns="0" tIns="0" rIns="0" bIns="0">
             <a:spAutoFit/>
           </a:bodyPr>
           <a:lstStyle/>
@@ -7678,26 +6826,41 @@
               </a:spcAft>
             </a:pPr>
             <a:r>
-              <a:rPr sz="1250" b="1">
+              <a:rPr sz="1400" b="1" dirty="0">
+                <a:solidFill>
+                  <a:srgbClr val="C00000"/>
+                </a:solidFill>
+                <a:latin typeface="Arial"/>
+              </a:rPr>
+              <a:t>Convenors</a:t>
+            </a:r>
+            <a:r>
+              <a:rPr sz="1400" b="1" dirty="0">
                 <a:solidFill>
                   <a:srgbClr val="595959"/>
                 </a:solidFill>
                 <a:latin typeface="Arial"/>
               </a:rPr>
-              <a:t>Convenors have theirs</a:t>
-            </a:r>
-          </a:p>
-        </p:txBody>
-      </p:sp>
-      <p:sp>
-        <p:nvSpPr>
-          <p:cNvPr id="12" name="TextBox 11"/>
+              <a:t> have theirs</a:t>
+            </a:r>
+          </a:p>
+        </p:txBody>
+      </p:sp>
+      <p:sp>
+        <p:nvSpPr>
+          <p:cNvPr id="13" name="TextBox 12">
+            <a:extLst>
+              <a:ext uri="{FF2B5EF4-FFF2-40B4-BE49-F238E27FC236}">
+                <a16:creationId xmlns:a16="http://schemas.microsoft.com/office/drawing/2014/main" id="{36B2B581-2276-0CE8-215A-E9A7BE328130}"/>
+              </a:ext>
+            </a:extLst>
+          </p:cNvPr>
           <p:cNvSpPr txBox="1"/>
           <p:nvPr/>
         </p:nvSpPr>
         <p:spPr>
           <a:xfrm>
-            <a:off x="347472" y="5550408"/>
+            <a:off x="521208" y="1124966"/>
             <a:ext cx="11521440" cy="640080"/>
           </a:xfrm>
           <a:prstGeom prst="rect">
@@ -7706,7 +6869,7 @@
           <a:noFill/>
         </p:spPr>
         <p:txBody>
-          <a:bodyPr wrap="square" lIns="0" rIns="0" tIns="0" bIns="0">
+          <a:bodyPr wrap="square" lIns="0" tIns="0" rIns="0" bIns="0">
             <a:spAutoFit/>
           </a:bodyPr>
           <a:lstStyle/>
@@ -7723,7 +6886,7 @@
               </a:spcAft>
             </a:pPr>
             <a:r>
-              <a:rPr sz="1700" b="0">
+              <a:rPr sz="1700" b="0" dirty="0">
                 <a:solidFill>
                   <a:srgbClr val="111111"/>
                 </a:solidFill>
@@ -7743,7 +6906,7 @@
 </file>
 
 <file path=ppt/slides/slide4.xml><?xml version="1.0" encoding="utf-8"?>
-<p:sld xmlns:a="http://schemas.openxmlformats.org/drawingml/2006/main" xmlns:p="http://schemas.openxmlformats.org/presentationml/2006/main" xmlns:r="http://schemas.openxmlformats.org/officeDocument/2006/relationships">
+<p:sld xmlns:a="http://schemas.openxmlformats.org/drawingml/2006/main" xmlns:r="http://schemas.openxmlformats.org/officeDocument/2006/relationships" xmlns:p="http://schemas.openxmlformats.org/presentationml/2006/main">
   <p:cSld>
     <p:spTree>
       <p:nvGrpSpPr>
@@ -7751,7 +6914,14 @@
         <p:cNvGrpSpPr/>
         <p:nvPr/>
       </p:nvGrpSpPr>
-      <p:grpSpPr/>
+      <p:grpSpPr>
+        <a:xfrm>
+          <a:off x="0" y="0"/>
+          <a:ext cx="0" cy="0"/>
+          <a:chOff x="0" y="0"/>
+          <a:chExt cx="0" cy="0"/>
+        </a:xfrm>
+      </p:grpSpPr>
       <p:sp>
         <p:nvSpPr>
           <p:cNvPr id="2" name="TextBox 1"/>
@@ -7761,7 +6931,7 @@
         <p:spPr>
           <a:xfrm>
             <a:off x="347472" y="73152"/>
-            <a:ext cx="9052560" cy="868680"/>
+            <a:ext cx="9052560" cy="492314"/>
           </a:xfrm>
           <a:prstGeom prst="rect">
             <a:avLst/>
@@ -7769,7 +6939,7 @@
           <a:noFill/>
         </p:spPr>
         <p:txBody>
-          <a:bodyPr wrap="square" lIns="0" rIns="0" tIns="0" bIns="0">
+          <a:bodyPr wrap="square" lIns="0" tIns="0" rIns="0" bIns="0">
             <a:spAutoFit/>
           </a:bodyPr>
           <a:lstStyle/>
@@ -7786,13 +6956,31 @@
               </a:spcAft>
             </a:pPr>
             <a:r>
-              <a:rPr sz="3200" b="1">
+              <a:rPr sz="3200" b="1" dirty="0">
                 <a:solidFill>
                   <a:srgbClr val="111111"/>
                 </a:solidFill>
                 <a:latin typeface="Arial"/>
               </a:rPr>
-              <a:t>The Candidate's View</a:t>
+              <a:t>The </a:t>
+            </a:r>
+            <a:r>
+              <a:rPr sz="3200" b="1" dirty="0">
+                <a:solidFill>
+                  <a:srgbClr val="C00000"/>
+                </a:solidFill>
+                <a:latin typeface="Arial"/>
+              </a:rPr>
+              <a:t>Candidate's</a:t>
+            </a:r>
+            <a:r>
+              <a:rPr sz="3200" b="1" dirty="0">
+                <a:solidFill>
+                  <a:srgbClr val="111111"/>
+                </a:solidFill>
+                <a:latin typeface="Arial"/>
+              </a:rPr>
+              <a:t> View</a:t>
             </a:r>
           </a:p>
         </p:txBody>
@@ -7838,81 +7026,13 @@
           <a:lstStyle/>
           <a:p>
             <a:pPr algn="ctr"/>
+            <a:endParaRPr/>
           </a:p>
         </p:txBody>
       </p:sp>
       <p:pic>
         <p:nvPicPr>
           <p:cNvPr id="4" name="Picture 3" descr="cap-logo.png"/>
-          <p:cNvPicPr>
-            <a:picLocks noChangeAspect="1"/>
-          </p:cNvPicPr>
-          <p:nvPr/>
-        </p:nvPicPr>
-        <p:blipFill>
-          <a:blip r:embed="rId2"/>
-          <a:stretch>
-            <a:fillRect/>
-          </a:stretch>
-        </p:blipFill>
-        <p:spPr>
-          <a:xfrm>
-            <a:off x="11475720" y="237744"/>
-            <a:ext cx="566928" cy="566928"/>
-          </a:xfrm>
-          <a:prstGeom prst="rect">
-            <a:avLst/>
-          </a:prstGeom>
-        </p:spPr>
-      </p:pic>
-      <p:sp>
-        <p:nvSpPr>
-          <p:cNvPr id="5" name="TextBox 4"/>
-          <p:cNvSpPr txBox="1"/>
-          <p:nvPr/>
-        </p:nvSpPr>
-        <p:spPr>
-          <a:xfrm>
-            <a:off x="347472" y="1188720"/>
-            <a:ext cx="11521440" cy="457200"/>
-          </a:xfrm>
-          <a:prstGeom prst="rect">
-            <a:avLst/>
-          </a:prstGeom>
-          <a:noFill/>
-        </p:spPr>
-        <p:txBody>
-          <a:bodyPr wrap="square" lIns="0" rIns="0" tIns="0" bIns="0">
-            <a:spAutoFit/>
-          </a:bodyPr>
-          <a:lstStyle/>
-          <a:p>
-            <a:pPr algn="l">
-              <a:lnSpc>
-                <a:spcPct val="125000"/>
-              </a:lnSpc>
-              <a:spcBef>
-                <a:spcPts val="0"/>
-              </a:spcBef>
-              <a:spcAft>
-                <a:spcPts val="0"/>
-              </a:spcAft>
-            </a:pPr>
-            <a:r>
-              <a:rPr sz="1700" b="0">
-                <a:solidFill>
-                  <a:srgbClr val="595959"/>
-                </a:solidFill>
-                <a:latin typeface="Arial"/>
-              </a:rPr>
-              <a:t>One page, one form — everything a student needs to do.</a:t>
-            </a:r>
-          </a:p>
-        </p:txBody>
-      </p:sp>
-      <p:pic>
-        <p:nvPicPr>
-          <p:cNvPr id="6" name="Picture 5" descr="10-candidate.png"/>
           <p:cNvPicPr>
             <a:picLocks noChangeAspect="1"/>
           </p:cNvPicPr>
@@ -7926,7 +7046,31 @@
         </p:blipFill>
         <p:spPr>
           <a:xfrm>
-            <a:off x="347472" y="1755648"/>
+            <a:off x="11475720" y="237744"/>
+            <a:ext cx="566928" cy="566928"/>
+          </a:xfrm>
+          <a:prstGeom prst="rect">
+            <a:avLst/>
+          </a:prstGeom>
+        </p:spPr>
+      </p:pic>
+      <p:pic>
+        <p:nvPicPr>
+          <p:cNvPr id="6" name="Picture 5" descr="10-candidate.png"/>
+          <p:cNvPicPr>
+            <a:picLocks noChangeAspect="1"/>
+          </p:cNvPicPr>
+          <p:nvPr/>
+        </p:nvPicPr>
+        <p:blipFill>
+          <a:blip r:embed="rId4"/>
+          <a:stretch>
+            <a:fillRect/>
+          </a:stretch>
+        </p:blipFill>
+        <p:spPr>
+          <a:xfrm>
+            <a:off x="347472" y="1224017"/>
             <a:ext cx="7406640" cy="4629150"/>
           </a:xfrm>
           <a:prstGeom prst="rect">
@@ -7942,7 +7086,7 @@
         </p:nvSpPr>
         <p:spPr>
           <a:xfrm>
-            <a:off x="347472" y="1755648"/>
+            <a:off x="347472" y="1224017"/>
             <a:ext cx="7406640" cy="4629150"/>
           </a:xfrm>
           <a:prstGeom prst="rect">
@@ -7975,6 +7119,7 @@
           <a:lstStyle/>
           <a:p>
             <a:pPr algn="ctr"/>
+            <a:endParaRPr/>
           </a:p>
         </p:txBody>
       </p:sp>
@@ -8019,6 +7164,7 @@
           <a:lstStyle/>
           <a:p>
             <a:pPr algn="ctr"/>
+            <a:endParaRPr/>
           </a:p>
         </p:txBody>
       </p:sp>
@@ -8031,7 +7177,7 @@
         <p:spPr>
           <a:xfrm>
             <a:off x="8302751" y="1901952"/>
-            <a:ext cx="3541472" cy="1005840"/>
+            <a:ext cx="3541472" cy="549831"/>
           </a:xfrm>
           <a:prstGeom prst="rect">
             <a:avLst/>
@@ -8039,7 +7185,7 @@
           <a:noFill/>
         </p:spPr>
         <p:txBody>
-          <a:bodyPr wrap="square" lIns="0" rIns="0" tIns="0" bIns="0">
+          <a:bodyPr wrap="square" lIns="0" tIns="0" rIns="0" bIns="0">
             <a:spAutoFit/>
           </a:bodyPr>
           <a:lstStyle/>
@@ -8056,10 +7202,7 @@
               </a:spcAft>
             </a:pPr>
             <a:r>
-              <a:rPr sz="1250" b="0">
-                <a:solidFill>
-                  <a:srgbClr val="595959"/>
-                </a:solidFill>
+              <a:rPr sz="1400" b="0" dirty="0">
                 <a:latin typeface="Arial"/>
               </a:rPr>
               <a:t>Details, teaching experience, ranked course choices, a supporting statement</a:t>
@@ -8108,6 +7251,7 @@
           <a:lstStyle/>
           <a:p>
             <a:pPr algn="ctr"/>
+            <a:endParaRPr/>
           </a:p>
         </p:txBody>
       </p:sp>
@@ -8120,7 +7264,7 @@
         <p:spPr>
           <a:xfrm>
             <a:off x="8302751" y="3044952"/>
-            <a:ext cx="3541472" cy="1005840"/>
+            <a:ext cx="3541472" cy="258982"/>
           </a:xfrm>
           <a:prstGeom prst="rect">
             <a:avLst/>
@@ -8128,7 +7272,7 @@
           <a:noFill/>
         </p:spPr>
         <p:txBody>
-          <a:bodyPr wrap="square" lIns="0" rIns="0" tIns="0" bIns="0">
+          <a:bodyPr wrap="square" lIns="0" tIns="0" rIns="0" bIns="0">
             <a:spAutoFit/>
           </a:bodyPr>
           <a:lstStyle/>
@@ -8145,13 +7289,13 @@
               </a:spcAft>
             </a:pPr>
             <a:r>
-              <a:rPr sz="1250" b="0">
+              <a:rPr sz="1400" b="0" dirty="0">
                 <a:solidFill>
                   <a:srgbClr val="595959"/>
                 </a:solidFill>
                 <a:latin typeface="Arial"/>
               </a:rPr>
-              <a:t>Always open — no recruitment round to wait for</a:t>
+              <a:t>Always open</a:t>
             </a:r>
           </a:p>
         </p:txBody>
@@ -8197,6 +7341,7 @@
           <a:lstStyle/>
           <a:p>
             <a:pPr algn="ctr"/>
+            <a:endParaRPr/>
           </a:p>
         </p:txBody>
       </p:sp>
@@ -8209,7 +7354,7 @@
         <p:spPr>
           <a:xfrm>
             <a:off x="8302751" y="4187952"/>
-            <a:ext cx="3541472" cy="1005840"/>
+            <a:ext cx="3541472" cy="549831"/>
           </a:xfrm>
           <a:prstGeom prst="rect">
             <a:avLst/>
@@ -8217,7 +7362,7 @@
           <a:noFill/>
         </p:spPr>
         <p:txBody>
-          <a:bodyPr wrap="square" lIns="0" rIns="0" tIns="0" bIns="0">
+          <a:bodyPr wrap="square" lIns="0" tIns="0" rIns="0" bIns="0">
             <a:spAutoFit/>
           </a:bodyPr>
           <a:lstStyle/>
@@ -8234,7 +7379,7 @@
               </a:spcAft>
             </a:pPr>
             <a:r>
-              <a:rPr sz="1250" b="0">
+              <a:rPr sz="1400" b="0" dirty="0">
                 <a:solidFill>
                   <a:srgbClr val="595959"/>
                 </a:solidFill>
@@ -8254,7 +7399,7 @@
 </file>
 
 <file path=ppt/slides/slide5.xml><?xml version="1.0" encoding="utf-8"?>
-<p:sld xmlns:a="http://schemas.openxmlformats.org/drawingml/2006/main" xmlns:p="http://schemas.openxmlformats.org/presentationml/2006/main" xmlns:r="http://schemas.openxmlformats.org/officeDocument/2006/relationships">
+<p:sld xmlns:a="http://schemas.openxmlformats.org/drawingml/2006/main" xmlns:r="http://schemas.openxmlformats.org/officeDocument/2006/relationships" xmlns:p="http://schemas.openxmlformats.org/presentationml/2006/main">
   <p:cSld>
     <p:spTree>
       <p:nvGrpSpPr>
@@ -8262,7 +7407,14 @@
         <p:cNvGrpSpPr/>
         <p:nvPr/>
       </p:nvGrpSpPr>
-      <p:grpSpPr/>
+      <p:grpSpPr>
+        <a:xfrm>
+          <a:off x="0" y="0"/>
+          <a:ext cx="0" cy="0"/>
+          <a:chOff x="0" y="0"/>
+          <a:chExt cx="0" cy="0"/>
+        </a:xfrm>
+      </p:grpSpPr>
       <p:sp>
         <p:nvSpPr>
           <p:cNvPr id="2" name="TextBox 1"/>
@@ -8272,7 +7424,7 @@
         <p:spPr>
           <a:xfrm>
             <a:off x="347472" y="73152"/>
-            <a:ext cx="9052560" cy="868680"/>
+            <a:ext cx="9052560" cy="492314"/>
           </a:xfrm>
           <a:prstGeom prst="rect">
             <a:avLst/>
@@ -8280,7 +7432,7 @@
           <a:noFill/>
         </p:spPr>
         <p:txBody>
-          <a:bodyPr wrap="square" lIns="0" rIns="0" tIns="0" bIns="0">
+          <a:bodyPr wrap="square" lIns="0" tIns="0" rIns="0" bIns="0">
             <a:spAutoFit/>
           </a:bodyPr>
           <a:lstStyle/>
@@ -8297,13 +7449,31 @@
               </a:spcAft>
             </a:pPr>
             <a:r>
-              <a:rPr sz="3200" b="1">
+              <a:rPr sz="3200" b="1" dirty="0">
                 <a:solidFill>
                   <a:srgbClr val="111111"/>
                 </a:solidFill>
                 <a:latin typeface="Arial"/>
               </a:rPr>
-              <a:t>The Convenor's View</a:t>
+              <a:t>The </a:t>
+            </a:r>
+            <a:r>
+              <a:rPr sz="3200" b="1" dirty="0">
+                <a:solidFill>
+                  <a:srgbClr val="C00000"/>
+                </a:solidFill>
+                <a:latin typeface="Arial"/>
+              </a:rPr>
+              <a:t>Convenor's</a:t>
+            </a:r>
+            <a:r>
+              <a:rPr sz="3200" b="1" dirty="0">
+                <a:solidFill>
+                  <a:srgbClr val="111111"/>
+                </a:solidFill>
+                <a:latin typeface="Arial"/>
+              </a:rPr>
+              <a:t> View</a:t>
             </a:r>
           </a:p>
         </p:txBody>
@@ -8349,81 +7519,13 @@
           <a:lstStyle/>
           <a:p>
             <a:pPr algn="ctr"/>
+            <a:endParaRPr/>
           </a:p>
         </p:txBody>
       </p:sp>
       <p:pic>
         <p:nvPicPr>
           <p:cNvPr id="4" name="Picture 3" descr="cap-logo.png"/>
-          <p:cNvPicPr>
-            <a:picLocks noChangeAspect="1"/>
-          </p:cNvPicPr>
-          <p:nvPr/>
-        </p:nvPicPr>
-        <p:blipFill>
-          <a:blip r:embed="rId2"/>
-          <a:stretch>
-            <a:fillRect/>
-          </a:stretch>
-        </p:blipFill>
-        <p:spPr>
-          <a:xfrm>
-            <a:off x="11475720" y="237744"/>
-            <a:ext cx="566928" cy="566928"/>
-          </a:xfrm>
-          <a:prstGeom prst="rect">
-            <a:avLst/>
-          </a:prstGeom>
-        </p:spPr>
-      </p:pic>
-      <p:sp>
-        <p:nvSpPr>
-          <p:cNvPr id="5" name="TextBox 4"/>
-          <p:cNvSpPr txBox="1"/>
-          <p:nvPr/>
-        </p:nvSpPr>
-        <p:spPr>
-          <a:xfrm>
-            <a:off x="347472" y="1188720"/>
-            <a:ext cx="11521440" cy="457200"/>
-          </a:xfrm>
-          <a:prstGeom prst="rect">
-            <a:avLst/>
-          </a:prstGeom>
-          <a:noFill/>
-        </p:spPr>
-        <p:txBody>
-          <a:bodyPr wrap="square" lIns="0" rIns="0" tIns="0" bIns="0">
-            <a:spAutoFit/>
-          </a:bodyPr>
-          <a:lstStyle/>
-          <a:p>
-            <a:pPr algn="l">
-              <a:lnSpc>
-                <a:spcPct val="125000"/>
-              </a:lnSpc>
-              <a:spcBef>
-                <a:spcPts val="0"/>
-              </a:spcBef>
-              <a:spcAft>
-                <a:spcPts val="0"/>
-              </a:spcAft>
-            </a:pPr>
-            <a:r>
-              <a:rPr sz="1700" b="0">
-                <a:solidFill>
-                  <a:srgbClr val="595959"/>
-                </a:solidFill>
-                <a:latin typeface="Arial"/>
-              </a:rPr>
-              <a:t>Every candidate in the pool, searchable by course.</a:t>
-            </a:r>
-          </a:p>
-        </p:txBody>
-      </p:sp>
-      <p:pic>
-        <p:nvPicPr>
-          <p:cNvPr id="6" name="Picture 5" descr="11-convenor.png"/>
           <p:cNvPicPr>
             <a:picLocks noChangeAspect="1"/>
           </p:cNvPicPr>
@@ -8437,6 +7539,30 @@
         </p:blipFill>
         <p:spPr>
           <a:xfrm>
+            <a:off x="11475720" y="237744"/>
+            <a:ext cx="566928" cy="566928"/>
+          </a:xfrm>
+          <a:prstGeom prst="rect">
+            <a:avLst/>
+          </a:prstGeom>
+        </p:spPr>
+      </p:pic>
+      <p:pic>
+        <p:nvPicPr>
+          <p:cNvPr id="6" name="Picture 5" descr="11-convenor.png"/>
+          <p:cNvPicPr>
+            <a:picLocks noChangeAspect="1"/>
+          </p:cNvPicPr>
+          <p:nvPr/>
+        </p:nvPicPr>
+        <p:blipFill>
+          <a:blip r:embed="rId4"/>
+          <a:stretch>
+            <a:fillRect/>
+          </a:stretch>
+        </p:blipFill>
+        <p:spPr>
+          <a:xfrm>
             <a:off x="347472" y="1755648"/>
             <a:ext cx="7406640" cy="4629150"/>
           </a:xfrm>
@@ -8486,6 +7612,7 @@
           <a:lstStyle/>
           <a:p>
             <a:pPr algn="ctr"/>
+            <a:endParaRPr/>
           </a:p>
         </p:txBody>
       </p:sp>
@@ -8530,6 +7657,7 @@
           <a:lstStyle/>
           <a:p>
             <a:pPr algn="ctr"/>
+            <a:endParaRPr/>
           </a:p>
         </p:txBody>
       </p:sp>
@@ -8542,7 +7670,7 @@
         <p:spPr>
           <a:xfrm>
             <a:off x="8302751" y="1901952"/>
-            <a:ext cx="3541472" cy="1005840"/>
+            <a:ext cx="3541472" cy="549831"/>
           </a:xfrm>
           <a:prstGeom prst="rect">
             <a:avLst/>
@@ -8550,7 +7678,7 @@
           <a:noFill/>
         </p:spPr>
         <p:txBody>
-          <a:bodyPr wrap="square" lIns="0" rIns="0" tIns="0" bIns="0">
+          <a:bodyPr wrap="square" lIns="0" tIns="0" rIns="0" bIns="0">
             <a:spAutoFit/>
           </a:bodyPr>
           <a:lstStyle/>
@@ -8567,7 +7695,7 @@
               </a:spcAft>
             </a:pPr>
             <a:r>
-              <a:rPr sz="1250" b="0">
+              <a:rPr sz="1400" b="0" dirty="0">
                 <a:solidFill>
                   <a:srgbClr val="595959"/>
                 </a:solidFill>
@@ -8619,6 +7747,7 @@
           <a:lstStyle/>
           <a:p>
             <a:pPr algn="ctr"/>
+            <a:endParaRPr/>
           </a:p>
         </p:txBody>
       </p:sp>
@@ -8631,7 +7760,7 @@
         <p:spPr>
           <a:xfrm>
             <a:off x="8302751" y="3044952"/>
-            <a:ext cx="3541472" cy="1005840"/>
+            <a:ext cx="3541472" cy="549831"/>
           </a:xfrm>
           <a:prstGeom prst="rect">
             <a:avLst/>
@@ -8639,7 +7768,7 @@
           <a:noFill/>
         </p:spPr>
         <p:txBody>
-          <a:bodyPr wrap="square" lIns="0" rIns="0" tIns="0" bIns="0">
+          <a:bodyPr wrap="square" lIns="0" tIns="0" rIns="0" bIns="0">
             <a:spAutoFit/>
           </a:bodyPr>
           <a:lstStyle/>
@@ -8656,7 +7785,7 @@
               </a:spcAft>
             </a:pPr>
             <a:r>
-              <a:rPr sz="1250" b="0">
+              <a:rPr sz="1400" b="0" dirty="0">
                 <a:solidFill>
                   <a:srgbClr val="595959"/>
                 </a:solidFill>
@@ -8708,6 +7837,7 @@
           <a:lstStyle/>
           <a:p>
             <a:pPr algn="ctr"/>
+            <a:endParaRPr/>
           </a:p>
         </p:txBody>
       </p:sp>
@@ -8720,7 +7850,7 @@
         <p:spPr>
           <a:xfrm>
             <a:off x="8302751" y="4187952"/>
-            <a:ext cx="3541472" cy="1005840"/>
+            <a:ext cx="3541472" cy="549831"/>
           </a:xfrm>
           <a:prstGeom prst="rect">
             <a:avLst/>
@@ -8728,7 +7858,7 @@
           <a:noFill/>
         </p:spPr>
         <p:txBody>
-          <a:bodyPr wrap="square" lIns="0" rIns="0" tIns="0" bIns="0">
+          <a:bodyPr wrap="square" lIns="0" tIns="0" rIns="0" bIns="0">
             <a:spAutoFit/>
           </a:bodyPr>
           <a:lstStyle/>
@@ -8745,7 +7875,7 @@
               </a:spcAft>
             </a:pPr>
             <a:r>
-              <a:rPr sz="1250" b="0">
+              <a:rPr sz="1400" b="0" dirty="0">
                 <a:solidFill>
                   <a:srgbClr val="595959"/>
                 </a:solidFill>
@@ -8765,7 +7895,7 @@
 </file>
 
 <file path=ppt/slides/slide6.xml><?xml version="1.0" encoding="utf-8"?>
-<p:sld xmlns:a="http://schemas.openxmlformats.org/drawingml/2006/main" xmlns:p="http://schemas.openxmlformats.org/presentationml/2006/main" xmlns:r="http://schemas.openxmlformats.org/officeDocument/2006/relationships">
+<p:sld xmlns:a="http://schemas.openxmlformats.org/drawingml/2006/main" xmlns:r="http://schemas.openxmlformats.org/officeDocument/2006/relationships" xmlns:p="http://schemas.openxmlformats.org/presentationml/2006/main">
   <p:cSld>
     <p:spTree>
       <p:nvGrpSpPr>
@@ -8773,7 +7903,14 @@
         <p:cNvGrpSpPr/>
         <p:nvPr/>
       </p:nvGrpSpPr>
-      <p:grpSpPr/>
+      <p:grpSpPr>
+        <a:xfrm>
+          <a:off x="0" y="0"/>
+          <a:ext cx="0" cy="0"/>
+          <a:chOff x="0" y="0"/>
+          <a:chExt cx="0" cy="0"/>
+        </a:xfrm>
+      </p:grpSpPr>
       <p:sp>
         <p:nvSpPr>
           <p:cNvPr id="2" name="TextBox 1"/>
@@ -8791,7 +7928,7 @@
           <a:noFill/>
         </p:spPr>
         <p:txBody>
-          <a:bodyPr wrap="square" lIns="0" rIns="0" tIns="0" bIns="0">
+          <a:bodyPr wrap="square" lIns="0" tIns="0" rIns="0" bIns="0">
             <a:spAutoFit/>
           </a:bodyPr>
           <a:lstStyle/>
@@ -8860,81 +7997,13 @@
           <a:lstStyle/>
           <a:p>
             <a:pPr algn="ctr"/>
+            <a:endParaRPr/>
           </a:p>
         </p:txBody>
       </p:sp>
       <p:pic>
         <p:nvPicPr>
           <p:cNvPr id="4" name="Picture 3" descr="cap-logo.png"/>
-          <p:cNvPicPr>
-            <a:picLocks noChangeAspect="1"/>
-          </p:cNvPicPr>
-          <p:nvPr/>
-        </p:nvPicPr>
-        <p:blipFill>
-          <a:blip r:embed="rId2"/>
-          <a:stretch>
-            <a:fillRect/>
-          </a:stretch>
-        </p:blipFill>
-        <p:spPr>
-          <a:xfrm>
-            <a:off x="11475720" y="237744"/>
-            <a:ext cx="566928" cy="566928"/>
-          </a:xfrm>
-          <a:prstGeom prst="rect">
-            <a:avLst/>
-          </a:prstGeom>
-        </p:spPr>
-      </p:pic>
-      <p:sp>
-        <p:nvSpPr>
-          <p:cNvPr id="5" name="TextBox 4"/>
-          <p:cNvSpPr txBox="1"/>
-          <p:nvPr/>
-        </p:nvSpPr>
-        <p:spPr>
-          <a:xfrm>
-            <a:off x="347472" y="1188720"/>
-            <a:ext cx="11521440" cy="457200"/>
-          </a:xfrm>
-          <a:prstGeom prst="rect">
-            <a:avLst/>
-          </a:prstGeom>
-          <a:noFill/>
-        </p:spPr>
-        <p:txBody>
-          <a:bodyPr wrap="square" lIns="0" rIns="0" tIns="0" bIns="0">
-            <a:spAutoFit/>
-          </a:bodyPr>
-          <a:lstStyle/>
-          <a:p>
-            <a:pPr algn="l">
-              <a:lnSpc>
-                <a:spcPct val="125000"/>
-              </a:lnSpc>
-              <a:spcBef>
-                <a:spcPts val="0"/>
-              </a:spcBef>
-              <a:spcAft>
-                <a:spcPts val="0"/>
-              </a:spcAft>
-            </a:pPr>
-            <a:r>
-              <a:rPr sz="1700" b="0">
-                <a:solidFill>
-                  <a:srgbClr val="595959"/>
-                </a:solidFill>
-                <a:latin typeface="Arial"/>
-              </a:rPr>
-              <a:t>Everything known about them, in one place.</a:t>
-            </a:r>
-          </a:p>
-        </p:txBody>
-      </p:sp>
-      <p:pic>
-        <p:nvPicPr>
-          <p:cNvPr id="6" name="Picture 5" descr="21-convenor-detail.png"/>
           <p:cNvPicPr>
             <a:picLocks noChangeAspect="1"/>
           </p:cNvPicPr>
@@ -8948,6 +8017,74 @@
         </p:blipFill>
         <p:spPr>
           <a:xfrm>
+            <a:off x="11475720" y="237744"/>
+            <a:ext cx="566928" cy="566928"/>
+          </a:xfrm>
+          <a:prstGeom prst="rect">
+            <a:avLst/>
+          </a:prstGeom>
+        </p:spPr>
+      </p:pic>
+      <p:sp>
+        <p:nvSpPr>
+          <p:cNvPr id="5" name="TextBox 4"/>
+          <p:cNvSpPr txBox="1"/>
+          <p:nvPr/>
+        </p:nvSpPr>
+        <p:spPr>
+          <a:xfrm>
+            <a:off x="347472" y="1188720"/>
+            <a:ext cx="11521440" cy="294889"/>
+          </a:xfrm>
+          <a:prstGeom prst="rect">
+            <a:avLst/>
+          </a:prstGeom>
+          <a:noFill/>
+        </p:spPr>
+        <p:txBody>
+          <a:bodyPr wrap="square" lIns="0" tIns="0" rIns="0" bIns="0">
+            <a:spAutoFit/>
+          </a:bodyPr>
+          <a:lstStyle/>
+          <a:p>
+            <a:pPr marL="285750" indent="-285750" algn="l">
+              <a:lnSpc>
+                <a:spcPct val="125000"/>
+              </a:lnSpc>
+              <a:spcBef>
+                <a:spcPts val="0"/>
+              </a:spcBef>
+              <a:spcAft>
+                <a:spcPts val="0"/>
+              </a:spcAft>
+              <a:buFont typeface="Arial" panose="020B0604020202020204" pitchFamily="34" charset="0"/>
+              <a:buChar char="•"/>
+            </a:pPr>
+            <a:r>
+              <a:rPr sz="1700" b="0" dirty="0">
+                <a:latin typeface="Arial"/>
+              </a:rPr>
+              <a:t>Everything known about them, in one place</a:t>
+            </a:r>
+          </a:p>
+        </p:txBody>
+      </p:sp>
+      <p:pic>
+        <p:nvPicPr>
+          <p:cNvPr id="6" name="Picture 5" descr="21-convenor-detail.png"/>
+          <p:cNvPicPr>
+            <a:picLocks noChangeAspect="1"/>
+          </p:cNvPicPr>
+          <p:nvPr/>
+        </p:nvPicPr>
+        <p:blipFill>
+          <a:blip r:embed="rId4"/>
+          <a:stretch>
+            <a:fillRect/>
+          </a:stretch>
+        </p:blipFill>
+        <p:spPr>
+          <a:xfrm>
             <a:off x="347472" y="1755648"/>
             <a:ext cx="7406640" cy="4629150"/>
           </a:xfrm>
@@ -8997,6 +8134,7 @@
           <a:lstStyle/>
           <a:p>
             <a:pPr algn="ctr"/>
+            <a:endParaRPr/>
           </a:p>
         </p:txBody>
       </p:sp>
@@ -9041,6 +8179,7 @@
           <a:lstStyle/>
           <a:p>
             <a:pPr algn="ctr"/>
+            <a:endParaRPr/>
           </a:p>
         </p:txBody>
       </p:sp>
@@ -9053,7 +8192,7 @@
         <p:spPr>
           <a:xfrm>
             <a:off x="8302751" y="1901952"/>
-            <a:ext cx="3541472" cy="1005840"/>
+            <a:ext cx="3541472" cy="258982"/>
           </a:xfrm>
           <a:prstGeom prst="rect">
             <a:avLst/>
@@ -9061,7 +8200,7 @@
           <a:noFill/>
         </p:spPr>
         <p:txBody>
-          <a:bodyPr wrap="square" lIns="0" rIns="0" tIns="0" bIns="0">
+          <a:bodyPr wrap="square" lIns="0" tIns="0" rIns="0" bIns="0">
             <a:spAutoFit/>
           </a:bodyPr>
           <a:lstStyle/>
@@ -9078,7 +8217,7 @@
               </a:spcAft>
             </a:pPr>
             <a:r>
-              <a:rPr sz="1250" b="0">
+              <a:rPr sz="1400" b="0" dirty="0">
                 <a:solidFill>
                   <a:srgbClr val="595959"/>
                 </a:solidFill>
@@ -9130,6 +8269,7 @@
           <a:lstStyle/>
           <a:p>
             <a:pPr algn="ctr"/>
+            <a:endParaRPr/>
           </a:p>
         </p:txBody>
       </p:sp>
@@ -9142,7 +8282,7 @@
         <p:spPr>
           <a:xfrm>
             <a:off x="8302751" y="3044952"/>
-            <a:ext cx="3541472" cy="1005840"/>
+            <a:ext cx="3541472" cy="549831"/>
           </a:xfrm>
           <a:prstGeom prst="rect">
             <a:avLst/>
@@ -9150,7 +8290,7 @@
           <a:noFill/>
         </p:spPr>
         <p:txBody>
-          <a:bodyPr wrap="square" lIns="0" rIns="0" tIns="0" bIns="0">
+          <a:bodyPr wrap="square" lIns="0" tIns="0" rIns="0" bIns="0">
             <a:spAutoFit/>
           </a:bodyPr>
           <a:lstStyle/>
@@ -9167,7 +8307,7 @@
               </a:spcAft>
             </a:pPr>
             <a:r>
-              <a:rPr sz="1250" b="0">
+              <a:rPr sz="1400" b="0" dirty="0">
                 <a:solidFill>
                   <a:srgbClr val="595959"/>
                 </a:solidFill>
@@ -9219,6 +8359,7 @@
           <a:lstStyle/>
           <a:p>
             <a:pPr algn="ctr"/>
+            <a:endParaRPr/>
           </a:p>
         </p:txBody>
       </p:sp>
@@ -9231,7 +8372,7 @@
         <p:spPr>
           <a:xfrm>
             <a:off x="8302751" y="4187952"/>
-            <a:ext cx="3541472" cy="1005840"/>
+            <a:ext cx="3541472" cy="549831"/>
           </a:xfrm>
           <a:prstGeom prst="rect">
             <a:avLst/>
@@ -9239,7 +8380,7 @@
           <a:noFill/>
         </p:spPr>
         <p:txBody>
-          <a:bodyPr wrap="square" lIns="0" rIns="0" tIns="0" bIns="0">
+          <a:bodyPr wrap="square" lIns="0" tIns="0" rIns="0" bIns="0">
             <a:spAutoFit/>
           </a:bodyPr>
           <a:lstStyle/>
@@ -9256,7 +8397,7 @@
               </a:spcAft>
             </a:pPr>
             <a:r>
-              <a:rPr sz="1250" b="0">
+              <a:rPr sz="1400" b="0" dirty="0">
                 <a:solidFill>
                   <a:srgbClr val="595959"/>
                 </a:solidFill>
@@ -9276,7 +8417,7 @@
 </file>
 
 <file path=ppt/slides/slide7.xml><?xml version="1.0" encoding="utf-8"?>
-<p:sld xmlns:a="http://schemas.openxmlformats.org/drawingml/2006/main" xmlns:p="http://schemas.openxmlformats.org/presentationml/2006/main" xmlns:r="http://schemas.openxmlformats.org/officeDocument/2006/relationships">
+<p:sld xmlns:a="http://schemas.openxmlformats.org/drawingml/2006/main" xmlns:r="http://schemas.openxmlformats.org/officeDocument/2006/relationships" xmlns:p="http://schemas.openxmlformats.org/presentationml/2006/main">
   <p:cSld>
     <p:spTree>
       <p:nvGrpSpPr>
@@ -9284,7 +8425,14 @@
         <p:cNvGrpSpPr/>
         <p:nvPr/>
       </p:nvGrpSpPr>
-      <p:grpSpPr/>
+      <p:grpSpPr>
+        <a:xfrm>
+          <a:off x="0" y="0"/>
+          <a:ext cx="0" cy="0"/>
+          <a:chOff x="0" y="0"/>
+          <a:chExt cx="0" cy="0"/>
+        </a:xfrm>
+      </p:grpSpPr>
       <p:sp>
         <p:nvSpPr>
           <p:cNvPr id="2" name="TextBox 1"/>
@@ -9294,7 +8442,7 @@
         <p:spPr>
           <a:xfrm>
             <a:off x="347472" y="73152"/>
-            <a:ext cx="9052560" cy="868680"/>
+            <a:ext cx="9052560" cy="492314"/>
           </a:xfrm>
           <a:prstGeom prst="rect">
             <a:avLst/>
@@ -9302,7 +8450,7 @@
           <a:noFill/>
         </p:spPr>
         <p:txBody>
-          <a:bodyPr wrap="square" lIns="0" rIns="0" tIns="0" bIns="0">
+          <a:bodyPr wrap="square" lIns="0" tIns="0" rIns="0" bIns="0">
             <a:spAutoFit/>
           </a:bodyPr>
           <a:lstStyle/>
@@ -9319,13 +8467,31 @@
               </a:spcAft>
             </a:pPr>
             <a:r>
-              <a:rPr sz="3200" b="1">
+              <a:rPr sz="3200" b="1" dirty="0">
                 <a:solidFill>
                   <a:srgbClr val="111111"/>
                 </a:solidFill>
                 <a:latin typeface="Arial"/>
               </a:rPr>
-              <a:t>The Administrator's View</a:t>
+              <a:t>The </a:t>
+            </a:r>
+            <a:r>
+              <a:rPr sz="3200" b="1" dirty="0">
+                <a:solidFill>
+                  <a:srgbClr val="C00000"/>
+                </a:solidFill>
+                <a:latin typeface="Arial"/>
+              </a:rPr>
+              <a:t>Administrator's</a:t>
+            </a:r>
+            <a:r>
+              <a:rPr sz="3200" b="1" dirty="0">
+                <a:solidFill>
+                  <a:srgbClr val="111111"/>
+                </a:solidFill>
+                <a:latin typeface="Arial"/>
+              </a:rPr>
+              <a:t> View</a:t>
             </a:r>
           </a:p>
         </p:txBody>
@@ -9371,81 +8537,13 @@
           <a:lstStyle/>
           <a:p>
             <a:pPr algn="ctr"/>
+            <a:endParaRPr/>
           </a:p>
         </p:txBody>
       </p:sp>
       <p:pic>
         <p:nvPicPr>
           <p:cNvPr id="4" name="Picture 3" descr="cap-logo.png"/>
-          <p:cNvPicPr>
-            <a:picLocks noChangeAspect="1"/>
-          </p:cNvPicPr>
-          <p:nvPr/>
-        </p:nvPicPr>
-        <p:blipFill>
-          <a:blip r:embed="rId2"/>
-          <a:stretch>
-            <a:fillRect/>
-          </a:stretch>
-        </p:blipFill>
-        <p:spPr>
-          <a:xfrm>
-            <a:off x="11475720" y="237744"/>
-            <a:ext cx="566928" cy="566928"/>
-          </a:xfrm>
-          <a:prstGeom prst="rect">
-            <a:avLst/>
-          </a:prstGeom>
-        </p:spPr>
-      </p:pic>
-      <p:sp>
-        <p:nvSpPr>
-          <p:cNvPr id="5" name="TextBox 4"/>
-          <p:cNvSpPr txBox="1"/>
-          <p:nvPr/>
-        </p:nvSpPr>
-        <p:spPr>
-          <a:xfrm>
-            <a:off x="347472" y="1188720"/>
-            <a:ext cx="11521440" cy="457200"/>
-          </a:xfrm>
-          <a:prstGeom prst="rect">
-            <a:avLst/>
-          </a:prstGeom>
-          <a:noFill/>
-        </p:spPr>
-        <p:txBody>
-          <a:bodyPr wrap="square" lIns="0" rIns="0" tIns="0" bIns="0">
-            <a:spAutoFit/>
-          </a:bodyPr>
-          <a:lstStyle/>
-          <a:p>
-            <a:pPr algn="l">
-              <a:lnSpc>
-                <a:spcPct val="125000"/>
-              </a:lnSpc>
-              <a:spcBef>
-                <a:spcPts val="0"/>
-              </a:spcBef>
-              <a:spcAft>
-                <a:spcPts val="0"/>
-              </a:spcAft>
-            </a:pPr>
-            <a:r>
-              <a:rPr sz="1700" b="0">
-                <a:solidFill>
-                  <a:srgbClr val="595959"/>
-                </a:solidFill>
-                <a:latin typeface="Arial"/>
-              </a:rPr>
-              <a:t>The School-wide picture, and the accounts behind it.</a:t>
-            </a:r>
-          </a:p>
-        </p:txBody>
-      </p:sp>
-      <p:pic>
-        <p:nvPicPr>
-          <p:cNvPr id="6" name="Picture 5" descr="12-admin.png"/>
           <p:cNvPicPr>
             <a:picLocks noChangeAspect="1"/>
           </p:cNvPicPr>
@@ -9459,6 +8557,74 @@
         </p:blipFill>
         <p:spPr>
           <a:xfrm>
+            <a:off x="11475720" y="237744"/>
+            <a:ext cx="566928" cy="566928"/>
+          </a:xfrm>
+          <a:prstGeom prst="rect">
+            <a:avLst/>
+          </a:prstGeom>
+        </p:spPr>
+      </p:pic>
+      <p:sp>
+        <p:nvSpPr>
+          <p:cNvPr id="5" name="TextBox 4"/>
+          <p:cNvSpPr txBox="1"/>
+          <p:nvPr/>
+        </p:nvSpPr>
+        <p:spPr>
+          <a:xfrm>
+            <a:off x="347472" y="1188720"/>
+            <a:ext cx="11521440" cy="294889"/>
+          </a:xfrm>
+          <a:prstGeom prst="rect">
+            <a:avLst/>
+          </a:prstGeom>
+          <a:noFill/>
+        </p:spPr>
+        <p:txBody>
+          <a:bodyPr wrap="square" lIns="0" tIns="0" rIns="0" bIns="0">
+            <a:spAutoFit/>
+          </a:bodyPr>
+          <a:lstStyle/>
+          <a:p>
+            <a:pPr marL="285750" indent="-285750" algn="l">
+              <a:lnSpc>
+                <a:spcPct val="125000"/>
+              </a:lnSpc>
+              <a:spcBef>
+                <a:spcPts val="0"/>
+              </a:spcBef>
+              <a:spcAft>
+                <a:spcPts val="0"/>
+              </a:spcAft>
+              <a:buFont typeface="Arial" panose="020B0604020202020204" pitchFamily="34" charset="0"/>
+              <a:buChar char="•"/>
+            </a:pPr>
+            <a:r>
+              <a:rPr sz="1700" b="0" dirty="0">
+                <a:latin typeface="Arial"/>
+              </a:rPr>
+              <a:t>The School-wide picture, and the accounts behind it</a:t>
+            </a:r>
+          </a:p>
+        </p:txBody>
+      </p:sp>
+      <p:pic>
+        <p:nvPicPr>
+          <p:cNvPr id="6" name="Picture 5" descr="12-admin.png"/>
+          <p:cNvPicPr>
+            <a:picLocks noChangeAspect="1"/>
+          </p:cNvPicPr>
+          <p:nvPr/>
+        </p:nvPicPr>
+        <p:blipFill>
+          <a:blip r:embed="rId4"/>
+          <a:stretch>
+            <a:fillRect/>
+          </a:stretch>
+        </p:blipFill>
+        <p:spPr>
+          <a:xfrm>
             <a:off x="347472" y="1755648"/>
             <a:ext cx="7406640" cy="4629150"/>
           </a:xfrm>
@@ -9508,6 +8674,7 @@
           <a:lstStyle/>
           <a:p>
             <a:pPr algn="ctr"/>
+            <a:endParaRPr/>
           </a:p>
         </p:txBody>
       </p:sp>
@@ -9552,6 +8719,7 @@
           <a:lstStyle/>
           <a:p>
             <a:pPr algn="ctr"/>
+            <a:endParaRPr/>
           </a:p>
         </p:txBody>
       </p:sp>
@@ -9564,7 +8732,7 @@
         <p:spPr>
           <a:xfrm>
             <a:off x="8302751" y="1901952"/>
-            <a:ext cx="3541472" cy="1005840"/>
+            <a:ext cx="3541472" cy="258982"/>
           </a:xfrm>
           <a:prstGeom prst="rect">
             <a:avLst/>
@@ -9572,7 +8740,7 @@
           <a:noFill/>
         </p:spPr>
         <p:txBody>
-          <a:bodyPr wrap="square" lIns="0" rIns="0" tIns="0" bIns="0">
+          <a:bodyPr wrap="square" lIns="0" tIns="0" rIns="0" bIns="0">
             <a:spAutoFit/>
           </a:bodyPr>
           <a:lstStyle/>
@@ -9589,7 +8757,7 @@
               </a:spcAft>
             </a:pPr>
             <a:r>
-              <a:rPr sz="1250" b="0">
+              <a:rPr sz="1400" b="0" dirty="0">
                 <a:solidFill>
                   <a:srgbClr val="595959"/>
                 </a:solidFill>
@@ -9641,6 +8809,7 @@
           <a:lstStyle/>
           <a:p>
             <a:pPr algn="ctr"/>
+            <a:endParaRPr/>
           </a:p>
         </p:txBody>
       </p:sp>
@@ -9653,7 +8822,7 @@
         <p:spPr>
           <a:xfrm>
             <a:off x="8302751" y="3044952"/>
-            <a:ext cx="3541472" cy="1005840"/>
+            <a:ext cx="3541472" cy="258982"/>
           </a:xfrm>
           <a:prstGeom prst="rect">
             <a:avLst/>
@@ -9661,7 +8830,7 @@
           <a:noFill/>
         </p:spPr>
         <p:txBody>
-          <a:bodyPr wrap="square" lIns="0" rIns="0" tIns="0" bIns="0">
+          <a:bodyPr wrap="square" lIns="0" tIns="0" rIns="0" bIns="0">
             <a:spAutoFit/>
           </a:bodyPr>
           <a:lstStyle/>
@@ -9678,7 +8847,7 @@
               </a:spcAft>
             </a:pPr>
             <a:r>
-              <a:rPr sz="1250" b="0">
+              <a:rPr sz="1400" b="0" dirty="0">
                 <a:solidFill>
                   <a:srgbClr val="595959"/>
                 </a:solidFill>
@@ -9730,6 +8899,7 @@
           <a:lstStyle/>
           <a:p>
             <a:pPr algn="ctr"/>
+            <a:endParaRPr/>
           </a:p>
         </p:txBody>
       </p:sp>
@@ -9742,7 +8912,7 @@
         <p:spPr>
           <a:xfrm>
             <a:off x="8302751" y="4187952"/>
-            <a:ext cx="3541472" cy="1005840"/>
+            <a:ext cx="3541472" cy="549831"/>
           </a:xfrm>
           <a:prstGeom prst="rect">
             <a:avLst/>
@@ -9750,7 +8920,7 @@
           <a:noFill/>
         </p:spPr>
         <p:txBody>
-          <a:bodyPr wrap="square" lIns="0" rIns="0" tIns="0" bIns="0">
+          <a:bodyPr wrap="square" lIns="0" tIns="0" rIns="0" bIns="0">
             <a:spAutoFit/>
           </a:bodyPr>
           <a:lstStyle/>
@@ -9767,7 +8937,7 @@
               </a:spcAft>
             </a:pPr>
             <a:r>
-              <a:rPr sz="1250" b="0">
+              <a:rPr sz="1400" b="0">
                 <a:solidFill>
                   <a:srgbClr val="595959"/>
                 </a:solidFill>
@@ -9787,7 +8957,7 @@
 </file>
 
 <file path=ppt/slides/slide8.xml><?xml version="1.0" encoding="utf-8"?>
-<p:sld xmlns:a="http://schemas.openxmlformats.org/drawingml/2006/main" xmlns:p="http://schemas.openxmlformats.org/presentationml/2006/main" xmlns:r="http://schemas.openxmlformats.org/officeDocument/2006/relationships">
+<p:sld xmlns:a="http://schemas.openxmlformats.org/drawingml/2006/main" xmlns:r="http://schemas.openxmlformats.org/officeDocument/2006/relationships" xmlns:p="http://schemas.openxmlformats.org/presentationml/2006/main">
   <p:cSld>
     <p:spTree>
       <p:nvGrpSpPr>
@@ -9795,7 +8965,14 @@
         <p:cNvGrpSpPr/>
         <p:nvPr/>
       </p:nvGrpSpPr>
-      <p:grpSpPr/>
+      <p:grpSpPr>
+        <a:xfrm>
+          <a:off x="0" y="0"/>
+          <a:ext cx="0" cy="0"/>
+          <a:chOff x="0" y="0"/>
+          <a:chExt cx="0" cy="0"/>
+        </a:xfrm>
+      </p:grpSpPr>
       <p:sp>
         <p:nvSpPr>
           <p:cNvPr id="2" name="TextBox 1"/>
@@ -9805,7 +8982,7 @@
         <p:spPr>
           <a:xfrm>
             <a:off x="347472" y="73152"/>
-            <a:ext cx="9052560" cy="868680"/>
+            <a:ext cx="9052560" cy="492314"/>
           </a:xfrm>
           <a:prstGeom prst="rect">
             <a:avLst/>
@@ -9813,7 +8990,7 @@
           <a:noFill/>
         </p:spPr>
         <p:txBody>
-          <a:bodyPr wrap="square" lIns="0" rIns="0" tIns="0" bIns="0">
+          <a:bodyPr wrap="square" lIns="0" tIns="0" rIns="0" bIns="0">
             <a:spAutoFit/>
           </a:bodyPr>
           <a:lstStyle/>
@@ -9830,13 +9007,22 @@
               </a:spcAft>
             </a:pPr>
             <a:r>
-              <a:rPr sz="3200" b="1">
+              <a:rPr sz="3200" b="1" dirty="0">
                 <a:solidFill>
                   <a:srgbClr val="111111"/>
                 </a:solidFill>
                 <a:latin typeface="Arial"/>
               </a:rPr>
-              <a:t>The Missing Half: A Week 0 Workshop</a:t>
+              <a:t>A Week 0 </a:t>
+            </a:r>
+            <a:r>
+              <a:rPr sz="3200" b="1" dirty="0">
+                <a:solidFill>
+                  <a:srgbClr val="C00000"/>
+                </a:solidFill>
+                <a:latin typeface="Arial"/>
+              </a:rPr>
+              <a:t>Workshop</a:t>
             </a:r>
           </a:p>
         </p:txBody>
@@ -9882,6 +9068,7 @@
           <a:lstStyle/>
           <a:p>
             <a:pPr algn="ctr"/>
+            <a:endParaRPr/>
           </a:p>
         </p:txBody>
       </p:sp>
@@ -9894,7 +9081,7 @@
           <p:nvPr/>
         </p:nvPicPr>
         <p:blipFill>
-          <a:blip r:embed="rId2"/>
+          <a:blip r:embed="rId3"/>
           <a:stretch>
             <a:fillRect/>
           </a:stretch>
@@ -9926,7 +9113,7 @@
           <a:noFill/>
         </p:spPr>
         <p:txBody>
-          <a:bodyPr wrap="square" lIns="0" rIns="0" tIns="0" bIns="0">
+          <a:bodyPr wrap="square" lIns="0" tIns="0" rIns="0" bIns="0">
             <a:spAutoFit/>
           </a:bodyPr>
           <a:lstStyle/>
@@ -9995,6 +9182,7 @@
           <a:lstStyle/>
           <a:p>
             <a:pPr algn="ctr"/>
+            <a:endParaRPr/>
           </a:p>
         </p:txBody>
       </p:sp>
@@ -10015,7 +9203,7 @@
           <a:noFill/>
         </p:spPr>
         <p:txBody>
-          <a:bodyPr wrap="square" lIns="0" rIns="0" tIns="0" bIns="0">
+          <a:bodyPr wrap="square" lIns="0" tIns="0" rIns="0" bIns="0">
             <a:spAutoFit/>
           </a:bodyPr>
           <a:lstStyle/>
@@ -10106,6 +9294,7 @@
           <a:lstStyle/>
           <a:p>
             <a:pPr algn="ctr"/>
+            <a:endParaRPr/>
           </a:p>
         </p:txBody>
       </p:sp>
@@ -10126,7 +9315,7 @@
           <a:noFill/>
         </p:spPr>
         <p:txBody>
-          <a:bodyPr wrap="square" lIns="0" rIns="0" tIns="0" bIns="0">
+          <a:bodyPr wrap="square" lIns="0" tIns="0" rIns="0" bIns="0">
             <a:spAutoFit/>
           </a:bodyPr>
           <a:lstStyle/>
@@ -10217,6 +9406,7 @@
           <a:lstStyle/>
           <a:p>
             <a:pPr algn="ctr"/>
+            <a:endParaRPr/>
           </a:p>
         </p:txBody>
       </p:sp>
@@ -10237,7 +9427,7 @@
           <a:noFill/>
         </p:spPr>
         <p:txBody>
-          <a:bodyPr wrap="square" lIns="0" rIns="0" tIns="0" bIns="0">
+          <a:bodyPr wrap="square" lIns="0" tIns="0" rIns="0" bIns="0">
             <a:spAutoFit/>
           </a:bodyPr>
           <a:lstStyle/>
@@ -10328,6 +9518,7 @@
           <a:lstStyle/>
           <a:p>
             <a:pPr algn="ctr"/>
+            <a:endParaRPr/>
           </a:p>
         </p:txBody>
       </p:sp>
@@ -10348,7 +9539,7 @@
           <a:noFill/>
         </p:spPr>
         <p:txBody>
-          <a:bodyPr wrap="square" lIns="0" rIns="0" tIns="0" bIns="0">
+          <a:bodyPr wrap="square" lIns="0" tIns="0" rIns="0" bIns="0">
             <a:spAutoFit/>
           </a:bodyPr>
           <a:lstStyle/>
@@ -10439,6 +9630,7 @@
           <a:lstStyle/>
           <a:p>
             <a:pPr algn="ctr"/>
+            <a:endParaRPr/>
           </a:p>
         </p:txBody>
       </p:sp>
@@ -10459,7 +9651,7 @@
           <a:noFill/>
         </p:spPr>
         <p:txBody>
-          <a:bodyPr wrap="square" lIns="0" rIns="0" tIns="0" bIns="0">
+          <a:bodyPr wrap="square" lIns="0" tIns="0" rIns="0" bIns="0">
             <a:spAutoFit/>
           </a:bodyPr>
           <a:lstStyle/>
@@ -10550,6 +9742,7 @@
           <a:lstStyle/>
           <a:p>
             <a:pPr algn="ctr"/>
+            <a:endParaRPr/>
           </a:p>
         </p:txBody>
       </p:sp>
@@ -10570,7 +9763,7 @@
           <a:noFill/>
         </p:spPr>
         <p:txBody>
-          <a:bodyPr wrap="square" lIns="0" rIns="0" tIns="0" bIns="0">
+          <a:bodyPr wrap="square" lIns="0" tIns="0" rIns="0" bIns="0">
             <a:spAutoFit/>
           </a:bodyPr>
           <a:lstStyle/>
@@ -10661,6 +9854,7 @@
           <a:lstStyle/>
           <a:p>
             <a:pPr algn="ctr"/>
+            <a:endParaRPr/>
           </a:p>
         </p:txBody>
       </p:sp>
@@ -10681,7 +9875,7 @@
           <a:noFill/>
         </p:spPr>
         <p:txBody>
-          <a:bodyPr wrap="square" lIns="0" rIns="0" tIns="0" bIns="0">
+          <a:bodyPr wrap="square" lIns="0" tIns="0" rIns="0" bIns="0">
             <a:spAutoFit/>
           </a:bodyPr>
           <a:lstStyle/>
@@ -10748,7 +9942,7 @@
           <a:noFill/>
         </p:spPr>
         <p:txBody>
-          <a:bodyPr wrap="square" lIns="0" rIns="0" tIns="0" bIns="0">
+          <a:bodyPr wrap="square" lIns="0" tIns="0" rIns="0" bIns="0">
             <a:spAutoFit/>
           </a:bodyPr>
           <a:lstStyle/>
@@ -10793,7 +9987,7 @@
           <a:noFill/>
         </p:spPr>
         <p:txBody>
-          <a:bodyPr wrap="square" lIns="0" rIns="0" tIns="0" bIns="0">
+          <a:bodyPr wrap="square" lIns="0" tIns="0" rIns="0" bIns="0">
             <a:spAutoFit/>
           </a:bodyPr>
           <a:lstStyle/>
@@ -10830,7 +10024,7 @@
 </file>
 
 <file path=ppt/slides/slide9.xml><?xml version="1.0" encoding="utf-8"?>
-<p:sld xmlns:a="http://schemas.openxmlformats.org/drawingml/2006/main" xmlns:p="http://schemas.openxmlformats.org/presentationml/2006/main" xmlns:r="http://schemas.openxmlformats.org/officeDocument/2006/relationships">
+<p:sld xmlns:a="http://schemas.openxmlformats.org/drawingml/2006/main" xmlns:r="http://schemas.openxmlformats.org/officeDocument/2006/relationships" xmlns:p="http://schemas.openxmlformats.org/presentationml/2006/main">
   <p:cSld>
     <p:spTree>
       <p:nvGrpSpPr>
@@ -10838,7 +10032,14 @@
         <p:cNvGrpSpPr/>
         <p:nvPr/>
       </p:nvGrpSpPr>
-      <p:grpSpPr/>
+      <p:grpSpPr>
+        <a:xfrm>
+          <a:off x="0" y="0"/>
+          <a:ext cx="0" cy="0"/>
+          <a:chOff x="0" y="0"/>
+          <a:chExt cx="0" cy="0"/>
+        </a:xfrm>
+      </p:grpSpPr>
       <p:sp>
         <p:nvSpPr>
           <p:cNvPr id="2" name="TextBox 1"/>
@@ -10856,7 +10057,7 @@
           <a:noFill/>
         </p:spPr>
         <p:txBody>
-          <a:bodyPr wrap="square" lIns="0" rIns="0" tIns="0" bIns="0">
+          <a:bodyPr wrap="square" lIns="0" tIns="0" rIns="0" bIns="0">
             <a:spAutoFit/>
           </a:bodyPr>
           <a:lstStyle/>
@@ -10925,6 +10126,7 @@
           <a:lstStyle/>
           <a:p>
             <a:pPr algn="ctr"/>
+            <a:endParaRPr/>
           </a:p>
         </p:txBody>
       </p:sp>
@@ -10937,7 +10139,7 @@
           <p:nvPr/>
         </p:nvPicPr>
         <p:blipFill>
-          <a:blip r:embed="rId2"/>
+          <a:blip r:embed="rId3"/>
           <a:stretch>
             <a:fillRect/>
           </a:stretch>
@@ -10969,7 +10171,7 @@
           <a:noFill/>
         </p:spPr>
         <p:txBody>
-          <a:bodyPr wrap="square" lIns="0" rIns="0" tIns="0" bIns="0">
+          <a:bodyPr wrap="square" lIns="0" tIns="0" rIns="0" bIns="0">
             <a:spAutoFit/>
           </a:bodyPr>
           <a:lstStyle/>
@@ -11038,6 +10240,7 @@
           <a:lstStyle/>
           <a:p>
             <a:pPr algn="ctr"/>
+            <a:endParaRPr/>
           </a:p>
         </p:txBody>
       </p:sp>
@@ -11082,6 +10285,7 @@
           <a:lstStyle/>
           <a:p>
             <a:pPr algn="ctr"/>
+            <a:endParaRPr/>
           </a:p>
         </p:txBody>
       </p:sp>
@@ -11094,7 +10298,7 @@
         <p:spPr>
           <a:xfrm>
             <a:off x="621792" y="1956816"/>
-            <a:ext cx="5120640" cy="1783080"/>
+            <a:ext cx="5120640" cy="1312219"/>
           </a:xfrm>
           <a:prstGeom prst="rect">
             <a:avLst/>
@@ -11102,7 +10306,7 @@
           <a:noFill/>
         </p:spPr>
         <p:txBody>
-          <a:bodyPr wrap="square" lIns="0" rIns="0" tIns="0" bIns="0">
+          <a:bodyPr wrap="square" lIns="0" tIns="0" rIns="0" bIns="0">
             <a:spAutoFit/>
           </a:bodyPr>
           <a:lstStyle/>
@@ -11119,7 +10323,7 @@
               </a:spcAft>
             </a:pPr>
             <a:r>
-              <a:rPr sz="1600" b="1">
+              <a:rPr sz="1600" b="1" dirty="0">
                 <a:solidFill>
                   <a:srgbClr val="0878B8"/>
                 </a:solidFill>
@@ -11141,14 +10345,71 @@
               </a:spcAft>
             </a:pPr>
             <a:r>
-              <a:rPr sz="1250" b="1">
+              <a:rPr sz="1250" b="1" dirty="0" err="1">
                 <a:solidFill>
                   <a:srgbClr val="111111"/>
                 </a:solidFill>
                 <a:latin typeface="Arial"/>
-              </a:rPr>
-              <a:t>wweisong.github.io/griffith-ict-casual-academic</a:t>
-            </a:r>
+                <a:hlinkClick r:id="rId4"/>
+              </a:rPr>
+              <a:t>wweisong.github.io</a:t>
+            </a:r>
+            <a:r>
+              <a:rPr sz="1250" b="1" dirty="0">
+                <a:solidFill>
+                  <a:srgbClr val="111111"/>
+                </a:solidFill>
+                <a:latin typeface="Arial"/>
+                <a:hlinkClick r:id="rId4"/>
+              </a:rPr>
+              <a:t>/</a:t>
+            </a:r>
+            <a:r>
+              <a:rPr sz="1250" b="1" dirty="0" err="1">
+                <a:solidFill>
+                  <a:srgbClr val="111111"/>
+                </a:solidFill>
+                <a:latin typeface="Arial"/>
+                <a:hlinkClick r:id="rId4"/>
+              </a:rPr>
+              <a:t>griffith</a:t>
+            </a:r>
+            <a:r>
+              <a:rPr sz="1250" b="1" dirty="0">
+                <a:solidFill>
+                  <a:srgbClr val="111111"/>
+                </a:solidFill>
+                <a:latin typeface="Arial"/>
+                <a:hlinkClick r:id="rId4"/>
+              </a:rPr>
+              <a:t>-</a:t>
+            </a:r>
+            <a:r>
+              <a:rPr sz="1250" b="1" dirty="0" err="1">
+                <a:solidFill>
+                  <a:srgbClr val="111111"/>
+                </a:solidFill>
+                <a:latin typeface="Arial"/>
+                <a:hlinkClick r:id="rId4"/>
+              </a:rPr>
+              <a:t>ict</a:t>
+            </a:r>
+            <a:r>
+              <a:rPr sz="1250" b="1" dirty="0">
+                <a:solidFill>
+                  <a:srgbClr val="111111"/>
+                </a:solidFill>
+                <a:latin typeface="Arial"/>
+                <a:hlinkClick r:id="rId4"/>
+              </a:rPr>
+              <a:t>-casual-academic</a:t>
+            </a:r>
+            <a:endParaRPr sz="1250" b="1" dirty="0">
+              <a:solidFill>
+                <a:srgbClr val="111111"/>
+              </a:solidFill>
+              <a:latin typeface="Arial"/>
+            </a:endParaRPr>
           </a:p>
           <a:p>
             <a:pPr algn="l">
@@ -11163,14 +10424,74 @@
               </a:spcAft>
             </a:pPr>
             <a:r>
-              <a:rPr sz="1600" b="1">
-                <a:solidFill>
-                  <a:srgbClr val="111111"/>
+              <a:rPr lang="en-US" altLang="zh-CN" sz="1400" b="1" dirty="0">
+                <a:solidFill>
+                  <a:schemeClr val="tx1">
+                    <a:lumMod val="65000"/>
+                    <a:lumOff val="35000"/>
+                  </a:schemeClr>
+                </a:solidFill>
+                <a:latin typeface="Arial"/>
+              </a:rPr>
+              <a:t>Mock</a:t>
+            </a:r>
+            <a:r>
+              <a:rPr lang="zh-CN" altLang="en-US" sz="1400" b="1" dirty="0">
+                <a:solidFill>
+                  <a:schemeClr val="tx1">
+                    <a:lumMod val="65000"/>
+                    <a:lumOff val="35000"/>
+                  </a:schemeClr>
+                </a:solidFill>
+                <a:latin typeface="Arial"/>
+              </a:rPr>
+              <a:t> </a:t>
+            </a:r>
+            <a:r>
+              <a:rPr lang="en-US" altLang="zh-CN" sz="1400" b="1" dirty="0">
+                <a:solidFill>
+                  <a:schemeClr val="tx1">
+                    <a:lumMod val="65000"/>
+                    <a:lumOff val="35000"/>
+                  </a:schemeClr>
+                </a:solidFill>
+                <a:latin typeface="Arial"/>
+              </a:rPr>
+              <a:t>Account:</a:t>
+            </a:r>
+            <a:r>
+              <a:rPr lang="zh-CN" altLang="en-US" sz="1400" b="1" dirty="0">
+                <a:solidFill>
+                  <a:schemeClr val="tx1">
+                    <a:lumMod val="65000"/>
+                    <a:lumOff val="35000"/>
+                  </a:schemeClr>
+                </a:solidFill>
+                <a:latin typeface="Arial"/>
+              </a:rPr>
+              <a:t> </a:t>
+            </a:r>
+            <a:r>
+              <a:rPr sz="1400" b="1" dirty="0" err="1">
+                <a:solidFill>
+                  <a:schemeClr val="tx1">
+                    <a:lumMod val="65000"/>
+                    <a:lumOff val="35000"/>
+                  </a:schemeClr>
                 </a:solidFill>
                 <a:latin typeface="Arial"/>
               </a:rPr>
               <a:t>sample.liam.chen@griffithuni.edu.au</a:t>
             </a:r>
+            <a:endParaRPr sz="1400" b="1" dirty="0">
+              <a:solidFill>
+                <a:schemeClr val="tx1">
+                  <a:lumMod val="65000"/>
+                  <a:lumOff val="35000"/>
+                </a:schemeClr>
+              </a:solidFill>
+              <a:latin typeface="Arial"/>
+            </a:endParaRPr>
           </a:p>
           <a:p>
             <a:pPr algn="l">
@@ -11185,35 +10506,40 @@
               </a:spcAft>
             </a:pPr>
             <a:r>
-              <a:rPr sz="1600" b="1">
-                <a:solidFill>
-                  <a:srgbClr val="C00000"/>
+              <a:rPr lang="en-US" altLang="zh-CN" sz="1400" b="1" dirty="0">
+                <a:solidFill>
+                  <a:schemeClr val="tx1">
+                    <a:lumMod val="65000"/>
+                    <a:lumOff val="35000"/>
+                  </a:schemeClr>
+                </a:solidFill>
+                <a:latin typeface="Arial"/>
+              </a:rPr>
+              <a:t>Password:</a:t>
+            </a:r>
+            <a:r>
+              <a:rPr lang="zh-CN" altLang="en-US" sz="1400" b="1" dirty="0">
+                <a:solidFill>
+                  <a:schemeClr val="tx1">
+                    <a:lumMod val="65000"/>
+                    <a:lumOff val="35000"/>
+                  </a:schemeClr>
+                </a:solidFill>
+                <a:latin typeface="Arial"/>
+              </a:rPr>
+              <a:t> </a:t>
+            </a:r>
+            <a:r>
+              <a:rPr sz="1400" b="1" dirty="0">
+                <a:solidFill>
+                  <a:schemeClr val="tx1">
+                    <a:lumMod val="65000"/>
+                    <a:lumOff val="35000"/>
+                  </a:schemeClr>
                 </a:solidFill>
                 <a:latin typeface="Arial"/>
               </a:rPr>
               <a:t>SamplePortal#2027</a:t>
-            </a:r>
-          </a:p>
-          <a:p>
-            <a:pPr algn="l">
-              <a:lnSpc>
-                <a:spcPct val="115000"/>
-              </a:lnSpc>
-              <a:spcBef>
-                <a:spcPts val="0"/>
-              </a:spcBef>
-              <a:spcAft>
-                <a:spcPts val="0"/>
-              </a:spcAft>
-            </a:pPr>
-            <a:r>
-              <a:rPr sz="1250" b="0">
-                <a:solidFill>
-                  <a:srgbClr val="595959"/>
-                </a:solidFill>
-                <a:latin typeface="Arial"/>
-              </a:rPr>
-              <a:t>Opens the application form a student fills in.</a:t>
             </a:r>
           </a:p>
         </p:txBody>
@@ -11259,6 +10585,7 @@
           <a:lstStyle/>
           <a:p>
             <a:pPr algn="ctr"/>
+            <a:endParaRPr/>
           </a:p>
         </p:txBody>
       </p:sp>
@@ -11303,6 +10630,7 @@
           <a:lstStyle/>
           <a:p>
             <a:pPr algn="ctr"/>
+            <a:endParaRPr/>
           </a:p>
         </p:txBody>
       </p:sp>
@@ -11315,7 +10643,7 @@
         <p:spPr>
           <a:xfrm>
             <a:off x="6519672" y="1956816"/>
-            <a:ext cx="5120640" cy="1783080"/>
+            <a:ext cx="5120640" cy="1312219"/>
           </a:xfrm>
           <a:prstGeom prst="rect">
             <a:avLst/>
@@ -11323,7 +10651,7 @@
           <a:noFill/>
         </p:spPr>
         <p:txBody>
-          <a:bodyPr wrap="square" lIns="0" rIns="0" tIns="0" bIns="0">
+          <a:bodyPr wrap="square" lIns="0" tIns="0" rIns="0" bIns="0">
             <a:spAutoFit/>
           </a:bodyPr>
           <a:lstStyle/>
@@ -11340,7 +10668,7 @@
               </a:spcAft>
             </a:pPr>
             <a:r>
-              <a:rPr sz="1600" b="1">
+              <a:rPr sz="1600" b="1" dirty="0">
                 <a:solidFill>
                   <a:srgbClr val="C00000"/>
                 </a:solidFill>
@@ -11362,14 +10690,71 @@
               </a:spcAft>
             </a:pPr>
             <a:r>
-              <a:rPr sz="1250" b="1">
+              <a:rPr sz="1250" b="1" dirty="0" err="1">
                 <a:solidFill>
                   <a:srgbClr val="111111"/>
                 </a:solidFill>
                 <a:latin typeface="Arial"/>
-              </a:rPr>
-              <a:t>wweisong.github.io/griffith-ict-casual-academic/#/staff</a:t>
-            </a:r>
+                <a:hlinkClick r:id="rId5"/>
+              </a:rPr>
+              <a:t>wweisong.github.io</a:t>
+            </a:r>
+            <a:r>
+              <a:rPr sz="1250" b="1" dirty="0">
+                <a:solidFill>
+                  <a:srgbClr val="111111"/>
+                </a:solidFill>
+                <a:latin typeface="Arial"/>
+                <a:hlinkClick r:id="rId5"/>
+              </a:rPr>
+              <a:t>/</a:t>
+            </a:r>
+            <a:r>
+              <a:rPr sz="1250" b="1" dirty="0" err="1">
+                <a:solidFill>
+                  <a:srgbClr val="111111"/>
+                </a:solidFill>
+                <a:latin typeface="Arial"/>
+                <a:hlinkClick r:id="rId5"/>
+              </a:rPr>
+              <a:t>griffith</a:t>
+            </a:r>
+            <a:r>
+              <a:rPr sz="1250" b="1" dirty="0">
+                <a:solidFill>
+                  <a:srgbClr val="111111"/>
+                </a:solidFill>
+                <a:latin typeface="Arial"/>
+                <a:hlinkClick r:id="rId5"/>
+              </a:rPr>
+              <a:t>-</a:t>
+            </a:r>
+            <a:r>
+              <a:rPr sz="1250" b="1" dirty="0" err="1">
+                <a:solidFill>
+                  <a:srgbClr val="111111"/>
+                </a:solidFill>
+                <a:latin typeface="Arial"/>
+                <a:hlinkClick r:id="rId5"/>
+              </a:rPr>
+              <a:t>ict</a:t>
+            </a:r>
+            <a:r>
+              <a:rPr sz="1250" b="1" dirty="0">
+                <a:solidFill>
+                  <a:srgbClr val="111111"/>
+                </a:solidFill>
+                <a:latin typeface="Arial"/>
+                <a:hlinkClick r:id="rId5"/>
+              </a:rPr>
+              <a:t>-casual-academic/#/staff</a:t>
+            </a:r>
+            <a:endParaRPr sz="1250" b="1" dirty="0">
+              <a:solidFill>
+                <a:srgbClr val="111111"/>
+              </a:solidFill>
+              <a:latin typeface="Arial"/>
+            </a:endParaRPr>
           </a:p>
           <a:p>
             <a:pPr algn="l">
@@ -11384,14 +10769,74 @@
               </a:spcAft>
             </a:pPr>
             <a:r>
-              <a:rPr sz="1600" b="1">
-                <a:solidFill>
-                  <a:srgbClr val="111111"/>
+              <a:rPr lang="en-US" altLang="zh-CN" sz="1400" b="1" dirty="0">
+                <a:solidFill>
+                  <a:schemeClr val="tx1">
+                    <a:lumMod val="65000"/>
+                    <a:lumOff val="35000"/>
+                  </a:schemeClr>
+                </a:solidFill>
+                <a:latin typeface="Arial"/>
+              </a:rPr>
+              <a:t>Mock</a:t>
+            </a:r>
+            <a:r>
+              <a:rPr lang="zh-CN" altLang="en-US" sz="1400" b="1" dirty="0">
+                <a:solidFill>
+                  <a:schemeClr val="tx1">
+                    <a:lumMod val="65000"/>
+                    <a:lumOff val="35000"/>
+                  </a:schemeClr>
+                </a:solidFill>
+                <a:latin typeface="Arial"/>
+              </a:rPr>
+              <a:t> </a:t>
+            </a:r>
+            <a:r>
+              <a:rPr lang="en-US" altLang="zh-CN" sz="1400" b="1" dirty="0">
+                <a:solidFill>
+                  <a:schemeClr val="tx1">
+                    <a:lumMod val="65000"/>
+                    <a:lumOff val="35000"/>
+                  </a:schemeClr>
+                </a:solidFill>
+                <a:latin typeface="Arial"/>
+              </a:rPr>
+              <a:t>Account:</a:t>
+            </a:r>
+            <a:r>
+              <a:rPr lang="zh-CN" altLang="en-US" sz="1400" b="1" dirty="0">
+                <a:solidFill>
+                  <a:schemeClr val="tx1">
+                    <a:lumMod val="65000"/>
+                    <a:lumOff val="35000"/>
+                  </a:schemeClr>
+                </a:solidFill>
+                <a:latin typeface="Arial"/>
+              </a:rPr>
+              <a:t> </a:t>
+            </a:r>
+            <a:r>
+              <a:rPr sz="1400" b="1" dirty="0" err="1">
+                <a:solidFill>
+                  <a:schemeClr val="tx1">
+                    <a:lumMod val="65000"/>
+                    <a:lumOff val="35000"/>
+                  </a:schemeClr>
                 </a:solidFill>
                 <a:latin typeface="Arial"/>
               </a:rPr>
               <a:t>sample.convenor@griffith.edu.au</a:t>
             </a:r>
+            <a:endParaRPr sz="1400" b="1" dirty="0">
+              <a:solidFill>
+                <a:schemeClr val="tx1">
+                  <a:lumMod val="65000"/>
+                  <a:lumOff val="35000"/>
+                </a:schemeClr>
+              </a:solidFill>
+              <a:latin typeface="Arial"/>
+            </a:endParaRPr>
           </a:p>
           <a:p>
             <a:pPr algn="l">
@@ -11406,35 +10851,40 @@
               </a:spcAft>
             </a:pPr>
             <a:r>
-              <a:rPr sz="1600" b="1">
-                <a:solidFill>
-                  <a:srgbClr val="C00000"/>
+              <a:rPr lang="en-US" altLang="zh-CN" sz="1400" b="1" dirty="0">
+                <a:solidFill>
+                  <a:schemeClr val="tx1">
+                    <a:lumMod val="65000"/>
+                    <a:lumOff val="35000"/>
+                  </a:schemeClr>
+                </a:solidFill>
+                <a:latin typeface="Arial"/>
+              </a:rPr>
+              <a:t>Password:</a:t>
+            </a:r>
+            <a:r>
+              <a:rPr lang="zh-CN" altLang="en-US" sz="1400" b="1" dirty="0">
+                <a:solidFill>
+                  <a:schemeClr val="tx1">
+                    <a:lumMod val="65000"/>
+                    <a:lumOff val="35000"/>
+                  </a:schemeClr>
+                </a:solidFill>
+                <a:latin typeface="Arial"/>
+              </a:rPr>
+              <a:t> </a:t>
+            </a:r>
+            <a:r>
+              <a:rPr sz="1400" b="1" dirty="0">
+                <a:solidFill>
+                  <a:schemeClr val="tx1">
+                    <a:lumMod val="65000"/>
+                    <a:lumOff val="35000"/>
+                  </a:schemeClr>
                 </a:solidFill>
                 <a:latin typeface="Arial"/>
               </a:rPr>
               <a:t>SamplePortal#2027</a:t>
-            </a:r>
-          </a:p>
-          <a:p>
-            <a:pPr algn="l">
-              <a:lnSpc>
-                <a:spcPct val="115000"/>
-              </a:lnSpc>
-              <a:spcBef>
-                <a:spcPts val="0"/>
-              </a:spcBef>
-              <a:spcAft>
-                <a:spcPts val="0"/>
-              </a:spcAft>
-            </a:pPr>
-            <a:r>
-              <a:rPr sz="1250" b="0">
-                <a:solidFill>
-                  <a:srgbClr val="595959"/>
-                </a:solidFill>
-                <a:latin typeface="Arial"/>
-              </a:rPr>
-              <a:t>Opens the candidate list — the page that matters most.</a:t>
             </a:r>
           </a:p>
         </p:txBody>
@@ -11448,7 +10898,7 @@
           <p:nvPr/>
         </p:nvPicPr>
         <p:blipFill>
-          <a:blip r:embed="rId3"/>
+          <a:blip r:embed="rId6"/>
           <a:stretch>
             <a:fillRect/>
           </a:stretch>
@@ -11504,6 +10954,7 @@
           <a:lstStyle/>
           <a:p>
             <a:pPr algn="ctr"/>
+            <a:endParaRPr/>
           </a:p>
         </p:txBody>
       </p:sp>
@@ -11524,7 +10975,7 @@
           <a:noFill/>
         </p:spPr>
         <p:txBody>
-          <a:bodyPr wrap="square" lIns="0" rIns="0" tIns="0" bIns="0">
+          <a:bodyPr wrap="square" lIns="0" tIns="0" rIns="0" bIns="0">
             <a:spAutoFit/>
           </a:bodyPr>
           <a:lstStyle/>
@@ -11891,44 +11342,44 @@
         <a:sysClr val="window" lastClr="FFFFFF"/>
       </a:lt1>
       <a:dk2>
-        <a:srgbClr val="1F497D"/>
+        <a:srgbClr val="0E2841"/>
       </a:dk2>
       <a:lt2>
-        <a:srgbClr val="EEECE1"/>
+        <a:srgbClr val="E8E8E8"/>
       </a:lt2>
       <a:accent1>
-        <a:srgbClr val="4F81BD"/>
+        <a:srgbClr val="156082"/>
       </a:accent1>
       <a:accent2>
-        <a:srgbClr val="C0504D"/>
+        <a:srgbClr val="E97132"/>
       </a:accent2>
       <a:accent3>
-        <a:srgbClr val="9BBB59"/>
+        <a:srgbClr val="196B24"/>
       </a:accent3>
       <a:accent4>
-        <a:srgbClr val="8064A2"/>
+        <a:srgbClr val="0F9ED5"/>
       </a:accent4>
       <a:accent5>
-        <a:srgbClr val="4BACC6"/>
+        <a:srgbClr val="A02B93"/>
       </a:accent5>
       <a:accent6>
-        <a:srgbClr val="F79646"/>
+        <a:srgbClr val="4EA72E"/>
       </a:accent6>
       <a:hlink>
-        <a:srgbClr val="0000FF"/>
+        <a:srgbClr val="467886"/>
       </a:hlink>
       <a:folHlink>
-        <a:srgbClr val="800080"/>
+        <a:srgbClr val="96607D"/>
       </a:folHlink>
     </a:clrScheme>
     <a:fontScheme name="Office">
       <a:majorFont>
-        <a:latin typeface="Calibri"/>
+        <a:latin typeface="Aptos Display" panose="02110004020202020204"/>
         <a:ea typeface=""/>
         <a:cs typeface=""/>
-        <a:font script="Jpan" typeface="ＭＳ Ｐゴシック"/>
+        <a:font script="Jpan" typeface="游ゴシック Light"/>
         <a:font script="Hang" typeface="맑은 고딕"/>
-        <a:font script="Hans" typeface="宋体"/>
+        <a:font script="Hans" typeface="等线 Light"/>
         <a:font script="Hant" typeface="新細明體"/>
         <a:font script="Arab" typeface="Times New Roman"/>
         <a:font script="Hebr" typeface="Times New Roman"/>
@@ -11956,14 +11407,31 @@
         <a:font script="Viet" typeface="Times New Roman"/>
         <a:font script="Uigh" typeface="Microsoft Uighur"/>
         <a:font script="Geor" typeface="Sylfaen"/>
+        <a:font script="Armn" typeface="Arial"/>
+        <a:font script="Bugi" typeface="Leelawadee UI"/>
+        <a:font script="Bopo" typeface="Microsoft JhengHei"/>
+        <a:font script="Java" typeface="Javanese Text"/>
+        <a:font script="Lisu" typeface="Segoe UI"/>
+        <a:font script="Mymr" typeface="Myanmar Text"/>
+        <a:font script="Nkoo" typeface="Ebrima"/>
+        <a:font script="Olck" typeface="Nirmala UI"/>
+        <a:font script="Osma" typeface="Ebrima"/>
+        <a:font script="Phag" typeface="Phagspa"/>
+        <a:font script="Syrn" typeface="Estrangelo Edessa"/>
+        <a:font script="Syrj" typeface="Estrangelo Edessa"/>
+        <a:font script="Syre" typeface="Estrangelo Edessa"/>
+        <a:font script="Sora" typeface="Nirmala UI"/>
+        <a:font script="Tale" typeface="Microsoft Tai Le"/>
+        <a:font script="Talu" typeface="Microsoft New Tai Lue"/>
+        <a:font script="Tfng" typeface="Ebrima"/>
       </a:majorFont>
       <a:minorFont>
-        <a:latin typeface="Calibri"/>
+        <a:latin typeface="Aptos" panose="02110004020202020204"/>
         <a:ea typeface=""/>
         <a:cs typeface=""/>
-        <a:font script="Jpan" typeface="ＭＳ Ｐゴシック"/>
+        <a:font script="Jpan" typeface="游ゴシック"/>
         <a:font script="Hang" typeface="맑은 고딕"/>
-        <a:font script="Hans" typeface="宋体"/>
+        <a:font script="Hans" typeface="等线"/>
         <a:font script="Hant" typeface="新細明體"/>
         <a:font script="Arab" typeface="Arial"/>
         <a:font script="Hebr" typeface="Arial"/>
@@ -11991,6 +11459,23 @@
         <a:font script="Viet" typeface="Arial"/>
         <a:font script="Uigh" typeface="Microsoft Uighur"/>
         <a:font script="Geor" typeface="Sylfaen"/>
+        <a:font script="Armn" typeface="Arial"/>
+        <a:font script="Bugi" typeface="Leelawadee UI"/>
+        <a:font script="Bopo" typeface="Microsoft JhengHei"/>
+        <a:font script="Java" typeface="Javanese Text"/>
+        <a:font script="Lisu" typeface="Segoe UI"/>
+        <a:font script="Mymr" typeface="Myanmar Text"/>
+        <a:font script="Nkoo" typeface="Ebrima"/>
+        <a:font script="Olck" typeface="Nirmala UI"/>
+        <a:font script="Osma" typeface="Ebrima"/>
+        <a:font script="Phag" typeface="Phagspa"/>
+        <a:font script="Syrn" typeface="Estrangelo Edessa"/>
+        <a:font script="Syrj" typeface="Estrangelo Edessa"/>
+        <a:font script="Syre" typeface="Estrangelo Edessa"/>
+        <a:font script="Sora" typeface="Nirmala UI"/>
+        <a:font script="Tale" typeface="Microsoft Tai Le"/>
+        <a:font script="Talu" typeface="Microsoft New Tai Lue"/>
+        <a:font script="Tfng" typeface="Ebrima"/>
       </a:minorFont>
     </a:fontScheme>
     <a:fmtScheme name="Office">
@@ -12002,180 +11487,136 @@
           <a:gsLst>
             <a:gs pos="0">
               <a:schemeClr val="phClr">
-                <a:tint val="50000"/>
-                <a:satMod val="300000"/>
+                <a:lumMod val="110000"/>
+                <a:satMod val="105000"/>
+                <a:tint val="67000"/>
               </a:schemeClr>
             </a:gs>
-            <a:gs pos="35000">
+            <a:gs pos="50000">
               <a:schemeClr val="phClr">
-                <a:tint val="37000"/>
-                <a:satMod val="300000"/>
+                <a:lumMod val="105000"/>
+                <a:satMod val="103000"/>
+                <a:tint val="73000"/>
               </a:schemeClr>
             </a:gs>
             <a:gs pos="100000">
               <a:schemeClr val="phClr">
-                <a:tint val="15000"/>
-                <a:satMod val="350000"/>
+                <a:lumMod val="105000"/>
+                <a:satMod val="109000"/>
+                <a:tint val="81000"/>
               </a:schemeClr>
             </a:gs>
           </a:gsLst>
-          <a:lin ang="16200000" scaled="1"/>
+          <a:lin ang="5400000" scaled="0"/>
         </a:gradFill>
         <a:gradFill rotWithShape="1">
           <a:gsLst>
             <a:gs pos="0">
               <a:schemeClr val="phClr">
-                <a:tint val="100000"/>
+                <a:satMod val="103000"/>
+                <a:lumMod val="102000"/>
+                <a:tint val="94000"/>
+              </a:schemeClr>
+            </a:gs>
+            <a:gs pos="50000">
+              <a:schemeClr val="phClr">
+                <a:satMod val="110000"/>
+                <a:lumMod val="100000"/>
                 <a:shade val="100000"/>
-                <a:satMod val="130000"/>
               </a:schemeClr>
             </a:gs>
             <a:gs pos="100000">
               <a:schemeClr val="phClr">
-                <a:tint val="50000"/>
-                <a:shade val="100000"/>
-                <a:satMod val="350000"/>
+                <a:lumMod val="99000"/>
+                <a:satMod val="120000"/>
+                <a:shade val="78000"/>
               </a:schemeClr>
             </a:gs>
           </a:gsLst>
-          <a:lin ang="16200000" scaled="0"/>
+          <a:lin ang="5400000" scaled="0"/>
         </a:gradFill>
       </a:fillStyleLst>
       <a:lnStyleLst>
-        <a:ln w="9525" cap="flat" cmpd="sng" algn="ctr">
+        <a:ln w="12700" cap="flat" cmpd="sng" algn="ctr">
           <a:solidFill>
-            <a:schemeClr val="phClr">
-              <a:shade val="95000"/>
-              <a:satMod val="105000"/>
-            </a:schemeClr>
+            <a:schemeClr val="phClr"/>
           </a:solidFill>
           <a:prstDash val="solid"/>
+          <a:miter lim="800000"/>
+        </a:ln>
+        <a:ln w="19050" cap="flat" cmpd="sng" algn="ctr">
+          <a:solidFill>
+            <a:schemeClr val="phClr"/>
+          </a:solidFill>
+          <a:prstDash val="solid"/>
+          <a:miter lim="800000"/>
         </a:ln>
         <a:ln w="25400" cap="flat" cmpd="sng" algn="ctr">
           <a:solidFill>
             <a:schemeClr val="phClr"/>
           </a:solidFill>
           <a:prstDash val="solid"/>
-        </a:ln>
-        <a:ln w="38100" cap="flat" cmpd="sng" algn="ctr">
-          <a:solidFill>
-            <a:schemeClr val="phClr"/>
-          </a:solidFill>
-          <a:prstDash val="solid"/>
+          <a:miter lim="800000"/>
         </a:ln>
       </a:lnStyleLst>
       <a:effectStyleLst>
         <a:effectStyle>
+          <a:effectLst/>
+        </a:effectStyle>
+        <a:effectStyle>
+          <a:effectLst/>
+        </a:effectStyle>
+        <a:effectStyle>
           <a:effectLst>
-            <a:outerShdw blurRad="40000" dist="20000" dir="5400000" rotWithShape="0">
+            <a:outerShdw blurRad="57150" dist="19050" dir="5400000" algn="ctr" rotWithShape="0">
               <a:srgbClr val="000000">
-                <a:alpha val="38000"/>
+                <a:alpha val="63000"/>
               </a:srgbClr>
             </a:outerShdw>
           </a:effectLst>
-        </a:effectStyle>
-        <a:effectStyle>
-          <a:effectLst>
-            <a:outerShdw blurRad="40000" dist="23000" dir="5400000" rotWithShape="0">
-              <a:srgbClr val="000000">
-                <a:alpha val="35000"/>
-              </a:srgbClr>
-            </a:outerShdw>
-          </a:effectLst>
-        </a:effectStyle>
-        <a:effectStyle>
-          <a:effectLst>
-            <a:outerShdw blurRad="40000" dist="23000" dir="5400000" rotWithShape="0">
-              <a:srgbClr val="000000">
-                <a:alpha val="35000"/>
-              </a:srgbClr>
-            </a:outerShdw>
-          </a:effectLst>
-          <a:scene3d>
-            <a:camera prst="orthographicFront">
-              <a:rot lat="0" lon="0" rev="0"/>
-            </a:camera>
-            <a:lightRig rig="threePt" dir="t">
-              <a:rot lat="0" lon="0" rev="1200000"/>
-            </a:lightRig>
-          </a:scene3d>
-          <a:sp3d>
-            <a:bevelT w="63500" h="25400"/>
-          </a:sp3d>
         </a:effectStyle>
       </a:effectStyleLst>
       <a:bgFillStyleLst>
         <a:solidFill>
           <a:schemeClr val="phClr"/>
         </a:solidFill>
+        <a:solidFill>
+          <a:schemeClr val="phClr">
+            <a:tint val="95000"/>
+            <a:satMod val="170000"/>
+          </a:schemeClr>
+        </a:solidFill>
         <a:gradFill rotWithShape="1">
           <a:gsLst>
             <a:gs pos="0">
               <a:schemeClr val="phClr">
-                <a:tint val="40000"/>
-                <a:satMod val="350000"/>
+                <a:tint val="93000"/>
+                <a:satMod val="150000"/>
+                <a:shade val="98000"/>
+                <a:lumMod val="102000"/>
               </a:schemeClr>
             </a:gs>
-            <a:gs pos="40000">
+            <a:gs pos="50000">
               <a:schemeClr val="phClr">
-                <a:tint val="45000"/>
-                <a:shade val="99000"/>
-                <a:satMod val="350000"/>
+                <a:tint val="98000"/>
+                <a:satMod val="130000"/>
+                <a:shade val="90000"/>
+                <a:lumMod val="103000"/>
               </a:schemeClr>
             </a:gs>
             <a:gs pos="100000">
               <a:schemeClr val="phClr">
-                <a:shade val="20000"/>
-                <a:satMod val="255000"/>
+                <a:shade val="63000"/>
+                <a:satMod val="120000"/>
               </a:schemeClr>
             </a:gs>
           </a:gsLst>
-          <a:path path="circle">
-            <a:fillToRect l="50000" t="-80000" r="50000" b="180000"/>
-          </a:path>
-        </a:gradFill>
-        <a:gradFill rotWithShape="1">
-          <a:gsLst>
-            <a:gs pos="0">
-              <a:schemeClr val="phClr">
-                <a:tint val="80000"/>
-                <a:satMod val="300000"/>
-              </a:schemeClr>
-            </a:gs>
-            <a:gs pos="100000">
-              <a:schemeClr val="phClr">
-                <a:shade val="30000"/>
-                <a:satMod val="200000"/>
-              </a:schemeClr>
-            </a:gs>
-          </a:gsLst>
-          <a:path path="circle">
-            <a:fillToRect l="50000" t="50000" r="50000" b="50000"/>
-          </a:path>
+          <a:lin ang="5400000" scaled="0"/>
         </a:gradFill>
       </a:bgFillStyleLst>
     </a:fmtScheme>
   </a:themeElements>
   <a:objectDefaults>
-    <a:spDef>
-      <a:spPr/>
-      <a:bodyPr/>
-      <a:lstStyle/>
-      <a:style>
-        <a:lnRef idx="1">
-          <a:schemeClr val="accent1"/>
-        </a:lnRef>
-        <a:fillRef idx="3">
-          <a:schemeClr val="accent1"/>
-        </a:fillRef>
-        <a:effectRef idx="2">
-          <a:schemeClr val="accent1"/>
-        </a:effectRef>
-        <a:fontRef idx="minor">
-          <a:schemeClr val="lt1"/>
-        </a:fontRef>
-      </a:style>
-    </a:spDef>
     <a:lnDef>
       <a:spPr/>
       <a:bodyPr/>
@@ -12197,5 +11638,10 @@
     </a:lnDef>
   </a:objectDefaults>
   <a:extraClrSchemeLst/>
+  <a:extLst>
+    <a:ext uri="{05A4C25C-085E-4340-85A3-A5531E510DB2}">
+      <thm15:themeFamily xmlns:thm15="http://schemas.microsoft.com/office/thememl/2012/main" name="Office Theme" id="{2E142A2C-CD16-42D6-873A-C26D2A0506FA}" vid="{1BDDFF52-6CD6-40A5-AB3C-68EB2F1E4D0A}"/>
+    </a:ext>
+  </a:extLst>
 </a:theme>
 </file>